--- a/Resume_A4.pptx
+++ b/Resume_A4.pptx
@@ -1,17 +1,17 @@
 
 <file path=ppt/presentation.xml><?xml version="1.0" encoding="utf-8"?>
-<p:presentation xmlns:a="http://schemas.openxmlformats.org/drawingml/2006/main" xmlns:r="http://schemas.openxmlformats.org/officeDocument/2006/relationships" xmlns:p="http://schemas.openxmlformats.org/presentationml/2006/main" saveSubsetFonts="1" autoCompressPictures="0">
+<p:presentation xmlns:a="http://schemas.openxmlformats.org/drawingml/2006/main" xmlns:r="http://schemas.openxmlformats.org/officeDocument/2006/relationships" xmlns:p="http://schemas.openxmlformats.org/presentationml/2006/main" autoCompressPictures="0">
   <p:sldMasterIdLst>
     <p:sldMasterId id="2147483648" r:id="rId1"/>
   </p:sldMasterIdLst>
+  <p:notesMasterIdLst>
+    <p:notesMasterId r:id="rId4"/>
+  </p:notesMasterIdLst>
   <p:sldIdLst>
-    <p:sldId id="256" r:id="rId2"/>
+    <p:sldId id="256" r:id="rId3"/>
   </p:sldIdLst>
-  <p:notesMasterIdLst>
-    <p:notesMasterId r:id="rId3"/>
-  </p:notesMasterIdLst>
-  <p:sldSz cx="7562088" cy="10689336"/>
-  <p:notesSz cx="10689336" cy="7562088"/>
+  <p:sldSz cx="7561580" cy="10688955"/>
+  <p:notesSz cx="10688955" cy="7561580"/>
   <p:defaultTextStyle>
     <a:lvl1pPr marL="0" algn="l" defTabSz="914400" rtl="0" eaLnBrk="1" latinLnBrk="0" hangingPunct="1">
       <a:defRPr sz="1800" kern="1200">
@@ -189,7 +189,6 @@
           <a:p>
             <a:fld id="{5282F153-3F37-0F45-9E97-73ACFA13230C}" type="datetimeFigureOut">
               <a:rPr lang="en-US"/>
-              <a:t>7/23/19</a:t>
             </a:fld>
             <a:endParaRPr lang="en-US"/>
           </a:p>
@@ -256,6 +255,7 @@
               <a:rPr lang="en-US"/>
               <a:t>Click to edit Master text styles</a:t>
             </a:r>
+            <a:endParaRPr lang="en-US"/>
           </a:p>
           <a:p>
             <a:pPr lvl="1"/>
@@ -263,6 +263,7 @@
               <a:rPr lang="en-US"/>
               <a:t>Second level</a:t>
             </a:r>
+            <a:endParaRPr lang="en-US"/>
           </a:p>
           <a:p>
             <a:pPr lvl="2"/>
@@ -270,6 +271,7 @@
               <a:rPr lang="en-US"/>
               <a:t>Third level</a:t>
             </a:r>
+            <a:endParaRPr lang="en-US"/>
           </a:p>
           <a:p>
             <a:pPr lvl="3"/>
@@ -277,6 +279,7 @@
               <a:rPr lang="en-US"/>
               <a:t>Fourth level</a:t>
             </a:r>
+            <a:endParaRPr lang="en-US"/>
           </a:p>
           <a:p>
             <a:pPr lvl="4"/>
@@ -284,6 +287,7 @@
               <a:rPr lang="en-US"/>
               <a:t>Fifth level</a:t>
             </a:r>
+            <a:endParaRPr lang="en-US"/>
           </a:p>
         </p:txBody>
       </p:sp>
@@ -347,18 +351,12 @@
           <a:p>
             <a:fld id="{CE5E9CC1-C706-0F49-92D6-E571CC5EEA8F}" type="slidenum">
               <a:rPr lang="en-US"/>
-              <a:t>‹#›</a:t>
             </a:fld>
             <a:endParaRPr lang="en-US"/>
           </a:p>
         </p:txBody>
       </p:sp>
     </p:spTree>
-    <p:extLst>
-      <p:ext uri="{BB962C8B-B14F-4D97-AF65-F5344CB8AC3E}">
-        <p14:creationId xmlns:p14="http://schemas.microsoft.com/office/powerpoint/2010/main" val="1024086991"/>
-      </p:ext>
-    </p:extLst>
   </p:cSld>
   <p:clrMap bg1="lt1" tx1="dk1" bg2="lt2" tx2="dk2" accent1="accent1" accent2="accent2" accent3="accent3" accent4="accent4" accent5="accent5" accent6="accent6" hlink="hlink" folHlink="folHlink"/>
   <p:notesStyle>
@@ -500,10 +498,6 @@
           <a:bodyPr/>
           <a:lstStyle/>
           <a:p>
-            <a:r>
-              <a:rPr lang="en-US" dirty="0"/>
-              <a:t/>
-            </a:r>
             <a:endParaRPr lang="en-US" dirty="0"/>
           </a:p>
         </p:txBody>
@@ -525,18 +519,12 @@
           <a:p>
             <a:fld id="{F7021451-1387-4CA6-816F-3879F97B5CBC}" type="slidenum">
               <a:rPr lang="en-US"/>
-              <a:t>1</a:t>
             </a:fld>
             <a:endParaRPr lang="en-US"/>
           </a:p>
         </p:txBody>
       </p:sp>
     </p:spTree>
-    <p:extLst>
-      <p:ext uri="{BB962C8B-B14F-4D97-AF65-F5344CB8AC3E}">
-        <p14:creationId xmlns:p14="http://schemas.microsoft.com/office/powerpoint/2010/main" val="1024086991"/>
-      </p:ext>
-    </p:extLst>
   </p:cSld>
   <p:clrMapOvr>
     <a:masterClrMapping/>
@@ -577,6 +565,11 @@
 <file path=ppt/slideMasters/slideMaster1.xml><?xml version="1.0" encoding="utf-8"?>
 <p:sldMaster xmlns:a="http://schemas.openxmlformats.org/drawingml/2006/main" xmlns:r="http://schemas.openxmlformats.org/officeDocument/2006/relationships" xmlns:p="http://schemas.openxmlformats.org/presentationml/2006/main">
   <p:cSld>
+    <p:bg>
+      <p:bgRef idx="1001">
+        <a:schemeClr val="bg1"/>
+      </p:bgRef>
+    </p:bg>
     <p:spTree>
       <p:nvGrpSpPr>
         <p:cNvPr id="1" name=""/>
@@ -620,7 +613,7 @@
         <a:spcBef>
           <a:spcPct val="20000"/>
         </a:spcBef>
-        <a:buFont typeface="Arial" pitchFamily="34" charset="0"/>
+        <a:buFont typeface="Arial" panose="020B0604020202090204" pitchFamily="34" charset="0"/>
         <a:buChar char="•"/>
         <a:defRPr sz="3200" kern="1200">
           <a:solidFill>
@@ -635,7 +628,7 @@
         <a:spcBef>
           <a:spcPct val="20000"/>
         </a:spcBef>
-        <a:buFont typeface="Arial" pitchFamily="34" charset="0"/>
+        <a:buFont typeface="Arial" panose="020B0604020202090204" pitchFamily="34" charset="0"/>
         <a:buChar char="–"/>
         <a:defRPr sz="2800" kern="1200">
           <a:solidFill>
@@ -650,7 +643,7 @@
         <a:spcBef>
           <a:spcPct val="20000"/>
         </a:spcBef>
-        <a:buFont typeface="Arial" pitchFamily="34" charset="0"/>
+        <a:buFont typeface="Arial" panose="020B0604020202090204" pitchFamily="34" charset="0"/>
         <a:buChar char="•"/>
         <a:defRPr sz="2400" kern="1200">
           <a:solidFill>
@@ -665,7 +658,7 @@
         <a:spcBef>
           <a:spcPct val="20000"/>
         </a:spcBef>
-        <a:buFont typeface="Arial" pitchFamily="34" charset="0"/>
+        <a:buFont typeface="Arial" panose="020B0604020202090204" pitchFamily="34" charset="0"/>
         <a:buChar char="–"/>
         <a:defRPr sz="2000" kern="1200">
           <a:solidFill>
@@ -680,7 +673,7 @@
         <a:spcBef>
           <a:spcPct val="20000"/>
         </a:spcBef>
-        <a:buFont typeface="Arial" pitchFamily="34" charset="0"/>
+        <a:buFont typeface="Arial" panose="020B0604020202090204" pitchFamily="34" charset="0"/>
         <a:buChar char="»"/>
         <a:defRPr sz="2000" kern="1200">
           <a:solidFill>
@@ -695,7 +688,7 @@
         <a:spcBef>
           <a:spcPct val="20000"/>
         </a:spcBef>
-        <a:buFont typeface="Arial" pitchFamily="34" charset="0"/>
+        <a:buFont typeface="Arial" panose="020B0604020202090204" pitchFamily="34" charset="0"/>
         <a:buChar char="•"/>
         <a:defRPr sz="2000" kern="1200">
           <a:solidFill>
@@ -710,7 +703,7 @@
         <a:spcBef>
           <a:spcPct val="20000"/>
         </a:spcBef>
-        <a:buFont typeface="Arial" pitchFamily="34" charset="0"/>
+        <a:buFont typeface="Arial" panose="020B0604020202090204" pitchFamily="34" charset="0"/>
         <a:buChar char="•"/>
         <a:defRPr sz="2000" kern="1200">
           <a:solidFill>
@@ -725,7 +718,7 @@
         <a:spcBef>
           <a:spcPct val="20000"/>
         </a:spcBef>
-        <a:buFont typeface="Arial" pitchFamily="34" charset="0"/>
+        <a:buFont typeface="Arial" panose="020B0604020202090204" pitchFamily="34" charset="0"/>
         <a:buChar char="•"/>
         <a:defRPr sz="2000" kern="1200">
           <a:solidFill>
@@ -740,7 +733,7 @@
         <a:spcBef>
           <a:spcPct val="20000"/>
         </a:spcBef>
-        <a:buFont typeface="Arial" pitchFamily="34" charset="0"/>
+        <a:buFont typeface="Arial" panose="020B0604020202090204" pitchFamily="34" charset="0"/>
         <a:buChar char="•"/>
         <a:defRPr sz="2000" kern="1200">
           <a:solidFill>
@@ -853,7 +846,7 @@
 
 <file path=ppt/slides/slide1.xml><?xml version="1.0" encoding="utf-8"?>
 <p:sld xmlns:a="http://schemas.openxmlformats.org/drawingml/2006/main" xmlns:r="http://schemas.openxmlformats.org/officeDocument/2006/relationships" xmlns:p="http://schemas.openxmlformats.org/presentationml/2006/main">
-  <p:cSld name="Slide 1">
+  <p:cSld>
     <p:spTree>
       <p:nvGrpSpPr>
         <p:cNvPr id="1" name=""/>
@@ -885,7 +878,6 @@
           <a:solidFill>
             <a:srgbClr val="F7F9FA"/>
           </a:solidFill>
-          <a:ln/>
         </p:spPr>
       </p:sp>
       <p:sp>
@@ -903,13 +895,12 @@
             <a:avLst/>
           </a:prstGeom>
           <a:noFill/>
-          <a:ln/>
-        </p:spPr>
-        <p:txBody>
-          <a:bodyPr wrap="square" rtlCol="0" anchor="ctr"/>
-          <a:lstStyle/>
-          <a:p>
-            <a:pPr indent="0" marL="0">
+        </p:spPr>
+        <p:txBody>
+          <a:bodyPr wrap="square" rtlCol="0" anchor="ctr"/>
+          <a:lstStyle/>
+          <a:p>
+            <a:pPr marL="0" indent="0">
               <a:buNone/>
             </a:pPr>
             <a:r>
@@ -917,9 +908,9 @@
                 <a:solidFill>
                   <a:srgbClr val="1F2937"/>
                 </a:solidFill>
-                <a:latin typeface="Helvetica" pitchFamily="34" charset="0"/>
-                <a:ea typeface="Helvetica" pitchFamily="34" charset="-122"/>
-                <a:cs typeface="Helvetica" pitchFamily="34" charset="-120"/>
+                <a:latin typeface="Arial" panose="020B0604020202090204" pitchFamily="34" charset="0"/>
+                <a:ea typeface="Arial" panose="020B0604020202090204" pitchFamily="34" charset="-122"/>
+                <a:cs typeface="Arial" panose="020B0604020202090204" pitchFamily="34" charset="-120"/>
               </a:rPr>
               <a:t>赵博洋</a:t>
             </a:r>
@@ -942,13 +933,12 @@
             <a:avLst/>
           </a:prstGeom>
           <a:noFill/>
-          <a:ln/>
-        </p:spPr>
-        <p:txBody>
-          <a:bodyPr wrap="square" rtlCol="0" anchor="ctr"/>
-          <a:lstStyle/>
-          <a:p>
-            <a:pPr indent="0" marL="0">
+        </p:spPr>
+        <p:txBody>
+          <a:bodyPr wrap="square" rtlCol="0" anchor="ctr"/>
+          <a:lstStyle/>
+          <a:p>
+            <a:pPr marL="0" indent="0">
               <a:buNone/>
             </a:pPr>
             <a:r>
@@ -956,9 +946,9 @@
                 <a:solidFill>
                   <a:srgbClr val="3B82F6"/>
                 </a:solidFill>
-                <a:latin typeface="Helvetica" pitchFamily="34" charset="0"/>
-                <a:ea typeface="Helvetica" pitchFamily="34" charset="-122"/>
-                <a:cs typeface="Helvetica" pitchFamily="34" charset="-120"/>
+                <a:latin typeface="Arial" panose="020B0604020202090204" pitchFamily="34" charset="0"/>
+                <a:ea typeface="Arial" panose="020B0604020202090204" pitchFamily="34" charset="-122"/>
+                <a:cs typeface="Arial" panose="020B0604020202090204" pitchFamily="34" charset="-120"/>
               </a:rPr>
               <a:t>新媒体运营 / 内容运营</a:t>
             </a:r>
@@ -981,13 +971,12 @@
             <a:avLst/>
           </a:prstGeom>
           <a:noFill/>
-          <a:ln/>
-        </p:spPr>
-        <p:txBody>
-          <a:bodyPr wrap="square" rtlCol="0" anchor="ctr"/>
-          <a:lstStyle/>
-          <a:p>
-            <a:pPr indent="0" marL="0">
+        </p:spPr>
+        <p:txBody>
+          <a:bodyPr wrap="square" rtlCol="0" anchor="ctr"/>
+          <a:lstStyle/>
+          <a:p>
+            <a:pPr marL="0" indent="0">
               <a:buNone/>
             </a:pPr>
             <a:r>
@@ -995,9 +984,9 @@
                 <a:solidFill>
                   <a:srgbClr val="4B5563"/>
                 </a:solidFill>
-                <a:latin typeface="Helvetica" pitchFamily="34" charset="0"/>
-                <a:ea typeface="Helvetica" pitchFamily="34" charset="-122"/>
-                <a:cs typeface="Helvetica" pitchFamily="34" charset="-120"/>
+                <a:latin typeface="Arial" panose="020B0604020202090204" pitchFamily="34" charset="0"/>
+                <a:ea typeface="Arial" panose="020B0604020202090204" pitchFamily="34" charset="-122"/>
+                <a:cs typeface="Arial" panose="020B0604020202090204" pitchFamily="34" charset="-120"/>
               </a:rPr>
               <a:t>懂心理学的爆款制造者</a:t>
             </a:r>
@@ -1020,13 +1009,12 @@
             <a:avLst/>
           </a:prstGeom>
           <a:noFill/>
-          <a:ln/>
-        </p:spPr>
-        <p:txBody>
-          <a:bodyPr wrap="square" rtlCol="0" anchor="ctr"/>
-          <a:lstStyle/>
-          <a:p>
-            <a:pPr indent="0" marL="0">
+        </p:spPr>
+        <p:txBody>
+          <a:bodyPr wrap="square" rtlCol="0" anchor="ctr"/>
+          <a:lstStyle/>
+          <a:p>
+            <a:pPr marL="0" indent="0">
               <a:buNone/>
             </a:pPr>
             <a:r>
@@ -1035,7 +1023,7 @@
                   <a:srgbClr val="1F2937"/>
                 </a:solidFill>
               </a:rPr>
-              <a:t>联系方式</a:t>
+              <a:t>个人信息</a:t>
             </a:r>
             <a:endParaRPr lang="en-US" sz="1300" dirty="0"/>
           </a:p>
@@ -1056,13 +1044,12 @@
             <a:avLst/>
           </a:prstGeom>
           <a:noFill/>
-          <a:ln/>
-        </p:spPr>
-        <p:txBody>
-          <a:bodyPr wrap="square" rtlCol="0" anchor="ctr"/>
-          <a:lstStyle/>
-          <a:p>
-            <a:pPr indent="0" marL="0">
+        </p:spPr>
+        <p:txBody>
+          <a:bodyPr wrap="square" rtlCol="0" anchor="ctr"/>
+          <a:lstStyle/>
+          <a:p>
+            <a:pPr marL="0" indent="0">
               <a:buNone/>
             </a:pPr>
             <a:r>
@@ -1071,7 +1058,7 @@
                   <a:srgbClr val="4B5563"/>
                 </a:solidFill>
               </a:rPr>
-              <a:t>17539817059</a:t>
+              <a:t>2003.08.01</a:t>
             </a:r>
             <a:endParaRPr lang="en-US" sz="900" dirty="0"/>
           </a:p>
@@ -1092,13 +1079,12 @@
             <a:avLst/>
           </a:prstGeom>
           <a:noFill/>
-          <a:ln/>
-        </p:spPr>
-        <p:txBody>
-          <a:bodyPr wrap="square" rtlCol="0" anchor="ctr"/>
-          <a:lstStyle/>
-          <a:p>
-            <a:pPr indent="0" marL="0">
+        </p:spPr>
+        <p:txBody>
+          <a:bodyPr wrap="square" rtlCol="0" anchor="ctr"/>
+          <a:lstStyle/>
+          <a:p>
+            <a:pPr marL="0" indent="0">
               <a:buNone/>
             </a:pPr>
             <a:r>
@@ -1107,7 +1093,7 @@
                   <a:srgbClr val="4B5563"/>
                 </a:solidFill>
               </a:rPr>
-              <a:t>1547548860@qq.com</a:t>
+              <a:t>17539817059</a:t>
             </a:r>
             <a:endParaRPr lang="en-US" sz="900" dirty="0"/>
           </a:p>
@@ -1128,13 +1114,12 @@
             <a:avLst/>
           </a:prstGeom>
           <a:noFill/>
-          <a:ln/>
-        </p:spPr>
-        <p:txBody>
-          <a:bodyPr wrap="square" rtlCol="0" anchor="ctr"/>
-          <a:lstStyle/>
-          <a:p>
-            <a:pPr indent="0" marL="0">
+        </p:spPr>
+        <p:txBody>
+          <a:bodyPr wrap="square" rtlCol="0" anchor="ctr"/>
+          <a:lstStyle/>
+          <a:p>
+            <a:pPr marL="0" indent="0">
               <a:buNone/>
             </a:pPr>
             <a:r>
@@ -1143,7 +1128,7 @@
                   <a:srgbClr val="4B5563"/>
                 </a:solidFill>
               </a:rPr>
-              <a:t>上海市宝山区</a:t>
+              <a:t>1547548860@qq.com</a:t>
             </a:r>
             <a:endParaRPr lang="en-US" sz="900" dirty="0"/>
           </a:p>
@@ -1164,13 +1149,12 @@
             <a:avLst/>
           </a:prstGeom>
           <a:noFill/>
-          <a:ln/>
-        </p:spPr>
-        <p:txBody>
-          <a:bodyPr wrap="square" rtlCol="0" anchor="ctr"/>
-          <a:lstStyle/>
-          <a:p>
-            <a:pPr indent="0" marL="0">
+        </p:spPr>
+        <p:txBody>
+          <a:bodyPr wrap="square" rtlCol="0" anchor="ctr"/>
+          <a:lstStyle/>
+          <a:p>
+            <a:pPr marL="0" indent="0">
               <a:buNone/>
             </a:pPr>
             <a:r>
@@ -1179,7 +1163,7 @@
                   <a:srgbClr val="4B5563"/>
                 </a:solidFill>
               </a:rPr>
-              <a:t>2003.08.01</a:t>
+              <a:t>上海市宝山区</a:t>
             </a:r>
             <a:endParaRPr lang="en-US" sz="900" dirty="0"/>
           </a:p>
@@ -1200,13 +1184,12 @@
             <a:avLst/>
           </a:prstGeom>
           <a:noFill/>
-          <a:ln/>
-        </p:spPr>
-        <p:txBody>
-          <a:bodyPr wrap="square" rtlCol="0" anchor="ctr"/>
-          <a:lstStyle/>
-          <a:p>
-            <a:pPr indent="0" marL="0">
+        </p:spPr>
+        <p:txBody>
+          <a:bodyPr wrap="square" rtlCol="0" anchor="ctr"/>
+          <a:lstStyle/>
+          <a:p>
+            <a:pPr marL="0" indent="0">
               <a:buNone/>
             </a:pPr>
             <a:r>
@@ -1236,13 +1219,12 @@
             <a:avLst/>
           </a:prstGeom>
           <a:noFill/>
-          <a:ln/>
-        </p:spPr>
-        <p:txBody>
-          <a:bodyPr wrap="square" rtlCol="0" anchor="ctr"/>
-          <a:lstStyle/>
-          <a:p>
-            <a:pPr indent="0" marL="0">
+        </p:spPr>
+        <p:txBody>
+          <a:bodyPr wrap="square" rtlCol="0" anchor="ctr"/>
+          <a:lstStyle/>
+          <a:p>
+            <a:pPr marL="0" indent="0">
               <a:buNone/>
             </a:pPr>
             <a:r>
@@ -1272,13 +1254,12 @@
             <a:avLst/>
           </a:prstGeom>
           <a:noFill/>
-          <a:ln/>
-        </p:spPr>
-        <p:txBody>
-          <a:bodyPr wrap="square" rtlCol="0" anchor="ctr"/>
-          <a:lstStyle/>
-          <a:p>
-            <a:pPr indent="0" marL="0">
+        </p:spPr>
+        <p:txBody>
+          <a:bodyPr wrap="square" rtlCol="0" anchor="ctr"/>
+          <a:lstStyle/>
+          <a:p>
+            <a:pPr marL="0" indent="0">
               <a:buNone/>
             </a:pPr>
             <a:r>
@@ -1308,13 +1289,12 @@
             <a:avLst/>
           </a:prstGeom>
           <a:noFill/>
-          <a:ln/>
-        </p:spPr>
-        <p:txBody>
-          <a:bodyPr wrap="square" rtlCol="0" anchor="ctr"/>
-          <a:lstStyle/>
-          <a:p>
-            <a:pPr indent="0" marL="0">
+        </p:spPr>
+        <p:txBody>
+          <a:bodyPr wrap="square" rtlCol="0" anchor="ctr"/>
+          <a:lstStyle/>
+          <a:p>
+            <a:pPr marL="0" indent="0">
               <a:buNone/>
             </a:pPr>
             <a:r>
@@ -1344,13 +1324,12 @@
             <a:avLst/>
           </a:prstGeom>
           <a:noFill/>
-          <a:ln/>
-        </p:spPr>
-        <p:txBody>
-          <a:bodyPr wrap="square" rtlCol="0" anchor="ctr"/>
-          <a:lstStyle/>
-          <a:p>
-            <a:pPr indent="0" marL="0">
+        </p:spPr>
+        <p:txBody>
+          <a:bodyPr wrap="square" rtlCol="0" anchor="ctr"/>
+          <a:lstStyle/>
+          <a:p>
+            <a:pPr marL="0" indent="0">
               <a:buNone/>
             </a:pPr>
             <a:r>
@@ -1380,13 +1359,12 @@
             <a:avLst/>
           </a:prstGeom>
           <a:noFill/>
-          <a:ln/>
-        </p:spPr>
-        <p:txBody>
-          <a:bodyPr wrap="square" rtlCol="0" anchor="ctr"/>
-          <a:lstStyle/>
-          <a:p>
-            <a:pPr indent="0" marL="0">
+        </p:spPr>
+        <p:txBody>
+          <a:bodyPr wrap="square" rtlCol="0" anchor="ctr"/>
+          <a:lstStyle/>
+          <a:p>
+            <a:pPr marL="0" indent="0">
               <a:buNone/>
             </a:pPr>
             <a:r>
@@ -1410,19 +1388,18 @@
         <p:spPr>
           <a:xfrm>
             <a:off x="274320" y="4160520"/>
-            <a:ext cx="2011680" cy="493776"/>
-          </a:xfrm>
-          <a:prstGeom prst="rect">
-            <a:avLst/>
-          </a:prstGeom>
-          <a:noFill/>
-          <a:ln/>
+            <a:ext cx="2011680" cy="585470"/>
+          </a:xfrm>
+          <a:prstGeom prst="rect">
+            <a:avLst/>
+          </a:prstGeom>
+          <a:noFill/>
         </p:spPr>
         <p:txBody>
           <a:bodyPr wrap="square" rtlCol="0" anchor="t"/>
           <a:lstStyle/>
           <a:p>
-            <a:pPr indent="0" marL="0">
+            <a:pPr marL="0" indent="0">
               <a:lnSpc>
                 <a:spcPts val="1200"/>
               </a:lnSpc>
@@ -1455,13 +1432,12 @@
             <a:avLst/>
           </a:prstGeom>
           <a:noFill/>
-          <a:ln/>
-        </p:spPr>
-        <p:txBody>
-          <a:bodyPr wrap="square" rtlCol="0" anchor="ctr"/>
-          <a:lstStyle/>
-          <a:p>
-            <a:pPr indent="0" marL="0">
+        </p:spPr>
+        <p:txBody>
+          <a:bodyPr wrap="square" rtlCol="0" anchor="ctr"/>
+          <a:lstStyle/>
+          <a:p>
+            <a:pPr marL="0" indent="0">
               <a:buNone/>
             </a:pPr>
             <a:r>
@@ -1491,13 +1467,12 @@
             <a:avLst/>
           </a:prstGeom>
           <a:noFill/>
-          <a:ln/>
         </p:spPr>
         <p:txBody>
           <a:bodyPr wrap="square" rtlCol="0" anchor="t"/>
           <a:lstStyle/>
           <a:p>
-            <a:pPr indent="0" marL="0">
+            <a:pPr marL="0" indent="0">
               <a:lnSpc>
                 <a:spcPts val="1200"/>
               </a:lnSpc>
@@ -1530,13 +1505,12 @@
             <a:avLst/>
           </a:prstGeom>
           <a:noFill/>
-          <a:ln/>
-        </p:spPr>
-        <p:txBody>
-          <a:bodyPr wrap="square" rtlCol="0" anchor="ctr"/>
-          <a:lstStyle/>
-          <a:p>
-            <a:pPr indent="0" marL="0">
+        </p:spPr>
+        <p:txBody>
+          <a:bodyPr wrap="square" rtlCol="0" anchor="ctr"/>
+          <a:lstStyle/>
+          <a:p>
+            <a:pPr marL="0" indent="0">
               <a:buNone/>
             </a:pPr>
             <a:r>
@@ -1566,13 +1540,12 @@
             <a:avLst/>
           </a:prstGeom>
           <a:noFill/>
-          <a:ln/>
         </p:spPr>
         <p:txBody>
           <a:bodyPr wrap="square" rtlCol="0" anchor="t"/>
           <a:lstStyle/>
           <a:p>
-            <a:pPr indent="0" marL="0">
+            <a:pPr marL="0" indent="0">
               <a:lnSpc>
                 <a:spcPts val="1200"/>
               </a:lnSpc>
@@ -1605,22 +1578,29 @@
             <a:avLst/>
           </a:prstGeom>
           <a:noFill/>
-          <a:ln/>
-        </p:spPr>
-        <p:txBody>
-          <a:bodyPr wrap="square" rtlCol="0" anchor="ctr"/>
-          <a:lstStyle/>
-          <a:p>
-            <a:pPr indent="0" marL="0">
-              <a:buNone/>
-            </a:pPr>
+        </p:spPr>
+        <p:txBody>
+          <a:bodyPr wrap="square" rtlCol="0" anchor="ctr"/>
+          <a:lstStyle/>
+          <a:p>
+            <a:pPr marL="0" indent="0">
+              <a:buNone/>
+            </a:pPr>
+            <a:r>
+              <a:rPr lang="en-US" sz="1000" dirty="0">
+                <a:solidFill>
+                  <a:srgbClr val="1F2937"/>
+                </a:solidFill>
+              </a:rPr>
+              <a:t>AIGC</a:t>
+            </a:r>
             <a:r>
               <a:rPr lang="en-US" sz="1000" b="1" dirty="0">
                 <a:solidFill>
                   <a:srgbClr val="1F2937"/>
                 </a:solidFill>
               </a:rPr>
-              <a:t>AIGC探索</a:t>
+              <a:t>探索</a:t>
             </a:r>
             <a:endParaRPr lang="en-US" sz="1000" dirty="0"/>
           </a:p>
@@ -1641,13 +1621,12 @@
             <a:avLst/>
           </a:prstGeom>
           <a:noFill/>
-          <a:ln/>
         </p:spPr>
         <p:txBody>
           <a:bodyPr wrap="square" rtlCol="0" anchor="t"/>
           <a:lstStyle/>
           <a:p>
-            <a:pPr indent="0" marL="0">
+            <a:pPr marL="0" indent="0">
               <a:lnSpc>
                 <a:spcPts val="1200"/>
               </a:lnSpc>
@@ -1680,13 +1659,12 @@
             <a:avLst/>
           </a:prstGeom>
           <a:noFill/>
-          <a:ln/>
-        </p:spPr>
-        <p:txBody>
-          <a:bodyPr wrap="square" rtlCol="0" anchor="ctr"/>
-          <a:lstStyle/>
-          <a:p>
-            <a:pPr indent="0" marL="0">
+        </p:spPr>
+        <p:txBody>
+          <a:bodyPr wrap="square" rtlCol="0" anchor="ctr"/>
+          <a:lstStyle/>
+          <a:p>
+            <a:pPr marL="0" indent="0">
               <a:buNone/>
             </a:pPr>
             <a:r>
@@ -1716,13 +1694,336 @@
             <a:avLst/>
           </a:prstGeom>
           <a:noFill/>
-          <a:ln/>
         </p:spPr>
         <p:txBody>
           <a:bodyPr wrap="square" rtlCol="0" anchor="t"/>
           <a:lstStyle/>
           <a:p>
-            <a:pPr indent="0" marL="0">
+            <a:pPr marL="0" indent="0">
+              <a:lnSpc>
+                <a:spcPts val="1400"/>
+              </a:lnSpc>
+              <a:buNone/>
+            </a:pPr>
+            <a:r>
+              <a:rPr lang="en-US" sz="1000" b="1" dirty="0">
+                <a:solidFill>
+                  <a:srgbClr val="1F2937"/>
+                </a:solidFill>
+              </a:rPr>
+              <a:t>从 0 到 1 账号孵化  |  </a:t>
+            </a:r>
+            <a:r>
+              <a:rPr lang="en-US" sz="1000" dirty="0">
+                <a:solidFill>
+                  <a:srgbClr val="4B5563"/>
+                </a:solidFill>
+              </a:rPr>
+              <a:t>独立完成抖音冷启动，累计获取42.1万粉丝。打造出单条播放破千万爆款视频，成功实现变现。</a:t>
+            </a:r>
+            <a:endParaRPr lang="en-US" sz="1000" dirty="0"/>
+          </a:p>
+        </p:txBody>
+      </p:sp>
+      <p:sp>
+        <p:nvSpPr>
+          <p:cNvPr id="26" name="Text 24"/>
+          <p:cNvSpPr/>
+          <p:nvPr/>
+        </p:nvSpPr>
+        <p:spPr>
+          <a:xfrm>
+            <a:off x="2743200" y="1216152"/>
+            <a:ext cx="4480560" cy="329184"/>
+          </a:xfrm>
+          <a:prstGeom prst="rect">
+            <a:avLst/>
+          </a:prstGeom>
+          <a:noFill/>
+        </p:spPr>
+        <p:txBody>
+          <a:bodyPr wrap="square" rtlCol="0" anchor="t"/>
+          <a:lstStyle/>
+          <a:p>
+            <a:pPr marL="0" indent="0">
+              <a:lnSpc>
+                <a:spcPts val="1400"/>
+              </a:lnSpc>
+              <a:buNone/>
+            </a:pPr>
+            <a:r>
+              <a:rPr lang="en-US" sz="1000" b="1" dirty="0">
+                <a:solidFill>
+                  <a:srgbClr val="1F2937"/>
+                </a:solidFill>
+              </a:rPr>
+              <a:t>长短视频制作  |  </a:t>
+            </a:r>
+            <a:r>
+              <a:rPr lang="en-US" sz="1000" dirty="0">
+                <a:solidFill>
+                  <a:srgbClr val="4B5563"/>
+                </a:solidFill>
+              </a:rPr>
+              <a:t>具备 B 站长线叙事能力（无推流 Vlog 获 4.5 万播放）。熟练使用 DaVinci/剪映，熟悉 Sora 等 AI 工具。</a:t>
+            </a:r>
+            <a:endParaRPr lang="en-US" sz="1000" dirty="0"/>
+          </a:p>
+        </p:txBody>
+      </p:sp>
+      <p:sp>
+        <p:nvSpPr>
+          <p:cNvPr id="27" name="Text 25"/>
+          <p:cNvSpPr/>
+          <p:nvPr/>
+        </p:nvSpPr>
+        <p:spPr>
+          <a:xfrm>
+            <a:off x="2743200" y="1655064"/>
+            <a:ext cx="4480560" cy="329184"/>
+          </a:xfrm>
+          <a:prstGeom prst="rect">
+            <a:avLst/>
+          </a:prstGeom>
+          <a:noFill/>
+        </p:spPr>
+        <p:txBody>
+          <a:bodyPr wrap="square" rtlCol="0" anchor="t"/>
+          <a:lstStyle/>
+          <a:p>
+            <a:pPr marL="0" indent="0">
+              <a:lnSpc>
+                <a:spcPts val="1400"/>
+              </a:lnSpc>
+              <a:buNone/>
+            </a:pPr>
+            <a:r>
+              <a:rPr lang="en-US" sz="1000" b="1" dirty="0">
+                <a:solidFill>
+                  <a:srgbClr val="1F2937"/>
+                </a:solidFill>
+              </a:rPr>
+              <a:t>社群运营与维护  |  </a:t>
+            </a:r>
+            <a:r>
+              <a:rPr lang="en-US" sz="1000" dirty="0">
+                <a:solidFill>
+                  <a:srgbClr val="4B5563"/>
+                </a:solidFill>
+              </a:rPr>
+              <a:t>协助管理百万粉网红社群，具突发事件处理能力。化解社群意见分歧，维护良好氛围。</a:t>
+            </a:r>
+            <a:endParaRPr lang="en-US" sz="1000" dirty="0"/>
+          </a:p>
+        </p:txBody>
+      </p:sp>
+      <p:sp>
+        <p:nvSpPr>
+          <p:cNvPr id="28" name="Text 26"/>
+          <p:cNvSpPr/>
+          <p:nvPr/>
+        </p:nvSpPr>
+        <p:spPr>
+          <a:xfrm>
+            <a:off x="2743200" y="2093976"/>
+            <a:ext cx="4480560" cy="329184"/>
+          </a:xfrm>
+          <a:prstGeom prst="rect">
+            <a:avLst/>
+          </a:prstGeom>
+          <a:noFill/>
+        </p:spPr>
+        <p:txBody>
+          <a:bodyPr wrap="square" rtlCol="0" anchor="t"/>
+          <a:lstStyle/>
+          <a:p>
+            <a:pPr marL="0" indent="0">
+              <a:lnSpc>
+                <a:spcPts val="1400"/>
+              </a:lnSpc>
+              <a:buNone/>
+            </a:pPr>
+            <a:r>
+              <a:rPr lang="en-US" sz="1000" b="1" dirty="0">
+                <a:solidFill>
+                  <a:srgbClr val="1F2937"/>
+                </a:solidFill>
+              </a:rPr>
+              <a:t>数据分析与洞察  |  </a:t>
+            </a:r>
+            <a:r>
+              <a:rPr lang="en-US" sz="1000" dirty="0">
+                <a:solidFill>
+                  <a:srgbClr val="4B5563"/>
+                </a:solidFill>
+              </a:rPr>
+              <a:t>心理学背景，熟练使用 SPSS 进行数据分析。曾通过 A/B 测试量化分析配乐对受众情绪的影响。</a:t>
+            </a:r>
+            <a:endParaRPr lang="en-US" sz="1000" dirty="0"/>
+          </a:p>
+        </p:txBody>
+      </p:sp>
+      <p:sp>
+        <p:nvSpPr>
+          <p:cNvPr id="29" name="Text 27"/>
+          <p:cNvSpPr/>
+          <p:nvPr/>
+        </p:nvSpPr>
+        <p:spPr>
+          <a:xfrm>
+            <a:off x="2743200" y="2624328"/>
+            <a:ext cx="4480560" cy="228600"/>
+          </a:xfrm>
+          <a:prstGeom prst="rect">
+            <a:avLst/>
+          </a:prstGeom>
+          <a:noFill/>
+        </p:spPr>
+        <p:txBody>
+          <a:bodyPr wrap="square" rtlCol="0" anchor="ctr"/>
+          <a:lstStyle/>
+          <a:p>
+            <a:pPr marL="0" indent="0">
+              <a:buNone/>
+            </a:pPr>
+            <a:r>
+              <a:rPr lang="en-US" sz="1400" b="1" dirty="0">
+                <a:solidFill>
+                  <a:srgbClr val="3B82F6"/>
+                </a:solidFill>
+              </a:rPr>
+              <a:t>项目与工作经历</a:t>
+            </a:r>
+            <a:endParaRPr lang="en-US" sz="1400" dirty="0"/>
+          </a:p>
+        </p:txBody>
+      </p:sp>
+      <p:sp>
+        <p:nvSpPr>
+          <p:cNvPr id="30" name="Text 28"/>
+          <p:cNvSpPr/>
+          <p:nvPr/>
+        </p:nvSpPr>
+        <p:spPr>
+          <a:xfrm>
+            <a:off x="2743200" y="2944368"/>
+            <a:ext cx="2834640" cy="182880"/>
+          </a:xfrm>
+          <a:prstGeom prst="rect">
+            <a:avLst/>
+          </a:prstGeom>
+          <a:noFill/>
+        </p:spPr>
+        <p:txBody>
+          <a:bodyPr wrap="square" rtlCol="0" anchor="ctr"/>
+          <a:lstStyle/>
+          <a:p>
+            <a:pPr marL="0" indent="0">
+              <a:buNone/>
+            </a:pPr>
+            <a:r>
+              <a:rPr lang="en-US" sz="1050" b="1" dirty="0">
+                <a:solidFill>
+                  <a:srgbClr val="1F2937"/>
+                </a:solidFill>
+              </a:rPr>
+              <a:t>抖音平台 / 泛二次元内容创作者</a:t>
+            </a:r>
+            <a:endParaRPr lang="en-US" sz="1050" dirty="0"/>
+          </a:p>
+        </p:txBody>
+      </p:sp>
+      <p:sp>
+        <p:nvSpPr>
+          <p:cNvPr id="31" name="Text 29"/>
+          <p:cNvSpPr/>
+          <p:nvPr/>
+        </p:nvSpPr>
+        <p:spPr>
+          <a:xfrm>
+            <a:off x="5577840" y="2944368"/>
+            <a:ext cx="1645920" cy="182880"/>
+          </a:xfrm>
+          <a:prstGeom prst="rect">
+            <a:avLst/>
+          </a:prstGeom>
+          <a:noFill/>
+        </p:spPr>
+        <p:txBody>
+          <a:bodyPr wrap="square" rtlCol="0" anchor="ctr"/>
+          <a:lstStyle/>
+          <a:p>
+            <a:pPr marL="0" indent="0" algn="r">
+              <a:buNone/>
+            </a:pPr>
+            <a:r>
+              <a:rPr lang="en-US" sz="900" dirty="0">
+                <a:solidFill>
+                  <a:srgbClr val="6B7280"/>
+                </a:solidFill>
+              </a:rPr>
+              <a:t>2019.05 - 2021.01</a:t>
+            </a:r>
+            <a:endParaRPr lang="en-US" sz="900" dirty="0"/>
+          </a:p>
+        </p:txBody>
+      </p:sp>
+      <p:sp>
+        <p:nvSpPr>
+          <p:cNvPr id="32" name="Text 30"/>
+          <p:cNvSpPr/>
+          <p:nvPr/>
+        </p:nvSpPr>
+        <p:spPr>
+          <a:xfrm>
+            <a:off x="2743200" y="3127248"/>
+            <a:ext cx="4480560" cy="182880"/>
+          </a:xfrm>
+          <a:prstGeom prst="rect">
+            <a:avLst/>
+          </a:prstGeom>
+          <a:noFill/>
+        </p:spPr>
+        <p:txBody>
+          <a:bodyPr wrap="square" rtlCol="0" anchor="ctr"/>
+          <a:lstStyle/>
+          <a:p>
+            <a:pPr marL="0" indent="0">
+              <a:buNone/>
+            </a:pPr>
+            <a:r>
+              <a:rPr lang="en-US" sz="950" i="1" dirty="0">
+                <a:solidFill>
+                  <a:srgbClr val="4B5563"/>
+                </a:solidFill>
+              </a:rPr>
+              <a:t>个人项目</a:t>
+            </a:r>
+            <a:endParaRPr lang="en-US" sz="950" dirty="0"/>
+          </a:p>
+        </p:txBody>
+      </p:sp>
+      <p:sp>
+        <p:nvSpPr>
+          <p:cNvPr id="33" name="Text 31"/>
+          <p:cNvSpPr/>
+          <p:nvPr/>
+        </p:nvSpPr>
+        <p:spPr>
+          <a:xfrm>
+            <a:off x="2834640" y="3328416"/>
+            <a:ext cx="4389120" cy="329184"/>
+          </a:xfrm>
+          <a:prstGeom prst="rect">
+            <a:avLst/>
+          </a:prstGeom>
+          <a:noFill/>
+        </p:spPr>
+        <p:txBody>
+          <a:bodyPr wrap="square" rtlCol="0" anchor="t"/>
+          <a:lstStyle/>
+          <a:p>
+            <a:pPr marL="0" indent="0">
               <a:lnSpc>
                 <a:spcPts val="1200"/>
               </a:lnSpc>
@@ -1731,24 +2032,64 @@
             <a:r>
               <a:rPr lang="en-US" sz="900" b="1" dirty="0">
                 <a:solidFill>
-                  <a:srgbClr val="1F2937"/>
-                </a:solidFill>
-              </a:rPr>
-              <a:t>从 0 到 1 账号孵化  |  </a:t>
-            </a:r>
-            <a:pPr indent="0" marL="0">
+                  <a:srgbClr val="4B5563"/>
+                </a:solidFill>
+              </a:rPr>
+              <a:t>• 爆款策划: </a:t>
+            </a:r>
+            <a:r>
+              <a:rPr lang="en-US" sz="900" dirty="0">
+                <a:solidFill>
+                  <a:srgbClr val="4B5563"/>
+                </a:solidFill>
+              </a:rPr>
+              <a:t>预测 ACG 圈层“转生类”题材热度，结合卡点剪辑，产出两条播放破千万、点赞破百万视频。</a:t>
+            </a:r>
+            <a:endParaRPr lang="en-US" sz="900" dirty="0"/>
+          </a:p>
+        </p:txBody>
+      </p:sp>
+      <p:sp>
+        <p:nvSpPr>
+          <p:cNvPr id="34" name="Text 32"/>
+          <p:cNvSpPr/>
+          <p:nvPr/>
+        </p:nvSpPr>
+        <p:spPr>
+          <a:xfrm>
+            <a:off x="2834640" y="3703320"/>
+            <a:ext cx="4389120" cy="329184"/>
+          </a:xfrm>
+          <a:prstGeom prst="rect">
+            <a:avLst/>
+          </a:prstGeom>
+          <a:noFill/>
+        </p:spPr>
+        <p:txBody>
+          <a:bodyPr wrap="square" rtlCol="0" anchor="t"/>
+          <a:lstStyle/>
+          <a:p>
+            <a:pPr marL="0" indent="0">
               <a:lnSpc>
                 <a:spcPts val="1200"/>
               </a:lnSpc>
               <a:buNone/>
             </a:pPr>
             <a:r>
+              <a:rPr lang="en-US" sz="900" b="1" dirty="0">
+                <a:solidFill>
+                  <a:srgbClr val="4B5563"/>
+                </a:solidFill>
+              </a:rPr>
+              <a:t>• 账号变现: </a:t>
+            </a:r>
+            <a:r>
               <a:rPr lang="en-US" sz="900" dirty="0">
                 <a:solidFill>
                   <a:srgbClr val="4B5563"/>
                 </a:solidFill>
               </a:rPr>
-              <a:t>独立完成抖音冷启动，累计获取42.1万粉丝。打造出单条播放破千万爆款视频，成功实现变现。</a:t>
+              <a:t>从 0 到 1 完成账号定位和内容迭代，积累粉丝 42.1 万。后续成功将账号转手变现。</a:t>
             </a:r>
             <a:endParaRPr lang="en-US" sz="900" dirty="0"/>
           </a:p>
@@ -1756,26 +2097,138 @@
       </p:sp>
       <p:sp>
         <p:nvSpPr>
-          <p:cNvPr id="26" name="Text 24"/>
-          <p:cNvSpPr/>
-          <p:nvPr/>
-        </p:nvSpPr>
-        <p:spPr>
-          <a:xfrm>
-            <a:off x="2743200" y="1179576"/>
-            <a:ext cx="4480560" cy="329184"/>
-          </a:xfrm>
-          <a:prstGeom prst="rect">
-            <a:avLst/>
-          </a:prstGeom>
-          <a:noFill/>
-          <a:ln/>
+          <p:cNvPr id="35" name="Text 33"/>
+          <p:cNvSpPr/>
+          <p:nvPr/>
+        </p:nvSpPr>
+        <p:spPr>
+          <a:xfrm>
+            <a:off x="2743200" y="4215384"/>
+            <a:ext cx="2834640" cy="182880"/>
+          </a:xfrm>
+          <a:prstGeom prst="rect">
+            <a:avLst/>
+          </a:prstGeom>
+          <a:noFill/>
+        </p:spPr>
+        <p:txBody>
+          <a:bodyPr wrap="square" rtlCol="0" anchor="ctr"/>
+          <a:lstStyle/>
+          <a:p>
+            <a:pPr marL="0" indent="0">
+              <a:buNone/>
+            </a:pPr>
+            <a:r>
+              <a:rPr lang="en-US" sz="1050" dirty="0">
+                <a:solidFill>
+                  <a:srgbClr val="1F2937"/>
+                </a:solidFill>
+              </a:rPr>
+              <a:t>B </a:t>
+            </a:r>
+            <a:r>
+              <a:rPr lang="en-US" sz="1050" b="1" dirty="0">
+                <a:solidFill>
+                  <a:srgbClr val="1F2937"/>
+                </a:solidFill>
+              </a:rPr>
+              <a:t>站 / 中长视频与垂直社区创作者</a:t>
+            </a:r>
+            <a:endParaRPr lang="en-US" sz="1050" dirty="0"/>
+          </a:p>
+        </p:txBody>
+      </p:sp>
+      <p:sp>
+        <p:nvSpPr>
+          <p:cNvPr id="36" name="Text 34"/>
+          <p:cNvSpPr/>
+          <p:nvPr/>
+        </p:nvSpPr>
+        <p:spPr>
+          <a:xfrm>
+            <a:off x="5577840" y="4215384"/>
+            <a:ext cx="1645920" cy="182880"/>
+          </a:xfrm>
+          <a:prstGeom prst="rect">
+            <a:avLst/>
+          </a:prstGeom>
+          <a:noFill/>
+        </p:spPr>
+        <p:txBody>
+          <a:bodyPr wrap="square" rtlCol="0" anchor="ctr"/>
+          <a:lstStyle/>
+          <a:p>
+            <a:pPr marL="0" indent="0" algn="r">
+              <a:buNone/>
+            </a:pPr>
+            <a:r>
+              <a:rPr lang="en-US" sz="900" dirty="0">
+                <a:solidFill>
+                  <a:srgbClr val="6B7280"/>
+                </a:solidFill>
+              </a:rPr>
+              <a:t>2022.09 - 至今</a:t>
+            </a:r>
+            <a:endParaRPr lang="en-US" sz="900" dirty="0"/>
+          </a:p>
+        </p:txBody>
+      </p:sp>
+      <p:sp>
+        <p:nvSpPr>
+          <p:cNvPr id="37" name="Text 35"/>
+          <p:cNvSpPr/>
+          <p:nvPr/>
+        </p:nvSpPr>
+        <p:spPr>
+          <a:xfrm>
+            <a:off x="2743200" y="4398264"/>
+            <a:ext cx="4480560" cy="182880"/>
+          </a:xfrm>
+          <a:prstGeom prst="rect">
+            <a:avLst/>
+          </a:prstGeom>
+          <a:noFill/>
+        </p:spPr>
+        <p:txBody>
+          <a:bodyPr wrap="square" rtlCol="0" anchor="ctr"/>
+          <a:lstStyle/>
+          <a:p>
+            <a:pPr marL="0" indent="0">
+              <a:buNone/>
+            </a:pPr>
+            <a:r>
+              <a:rPr lang="en-US" sz="950" i="1" dirty="0">
+                <a:solidFill>
+                  <a:srgbClr val="4B5563"/>
+                </a:solidFill>
+              </a:rPr>
+              <a:t>个人项目</a:t>
+            </a:r>
+            <a:endParaRPr lang="en-US" sz="950" dirty="0"/>
+          </a:p>
+        </p:txBody>
+      </p:sp>
+      <p:sp>
+        <p:nvSpPr>
+          <p:cNvPr id="38" name="Text 36"/>
+          <p:cNvSpPr/>
+          <p:nvPr/>
+        </p:nvSpPr>
+        <p:spPr>
+          <a:xfrm>
+            <a:off x="2834640" y="4599432"/>
+            <a:ext cx="4389120" cy="329184"/>
+          </a:xfrm>
+          <a:prstGeom prst="rect">
+            <a:avLst/>
+          </a:prstGeom>
+          <a:noFill/>
         </p:spPr>
         <p:txBody>
           <a:bodyPr wrap="square" rtlCol="0" anchor="t"/>
           <a:lstStyle/>
           <a:p>
-            <a:pPr indent="0" marL="0">
+            <a:pPr marL="0" indent="0">
               <a:lnSpc>
                 <a:spcPts val="1200"/>
               </a:lnSpc>
@@ -1784,24 +2237,64 @@
             <a:r>
               <a:rPr lang="en-US" sz="900" b="1" dirty="0">
                 <a:solidFill>
-                  <a:srgbClr val="1F2937"/>
-                </a:solidFill>
-              </a:rPr>
-              <a:t>长短视频制作  |  </a:t>
-            </a:r>
-            <a:pPr indent="0" marL="0">
+                  <a:srgbClr val="4B5563"/>
+                </a:solidFill>
+              </a:rPr>
+              <a:t>• 长线叙事: </a:t>
+            </a:r>
+            <a:r>
+              <a:rPr lang="en-US" sz="900" dirty="0">
+                <a:solidFill>
+                  <a:srgbClr val="4B5563"/>
+                </a:solidFill>
+              </a:rPr>
+              <a:t>策划、拍摄并剪辑 28 分钟 Vlog。无官方推荐下单条获 4.5 万播放，转化 300+ 关注。</a:t>
+            </a:r>
+            <a:endParaRPr lang="en-US" sz="900" dirty="0"/>
+          </a:p>
+        </p:txBody>
+      </p:sp>
+      <p:sp>
+        <p:nvSpPr>
+          <p:cNvPr id="39" name="Text 37"/>
+          <p:cNvSpPr/>
+          <p:nvPr/>
+        </p:nvSpPr>
+        <p:spPr>
+          <a:xfrm>
+            <a:off x="2834640" y="4974336"/>
+            <a:ext cx="4389120" cy="329184"/>
+          </a:xfrm>
+          <a:prstGeom prst="rect">
+            <a:avLst/>
+          </a:prstGeom>
+          <a:noFill/>
+        </p:spPr>
+        <p:txBody>
+          <a:bodyPr wrap="square" rtlCol="0" anchor="t"/>
+          <a:lstStyle/>
+          <a:p>
+            <a:pPr marL="0" indent="0">
               <a:lnSpc>
                 <a:spcPts val="1200"/>
               </a:lnSpc>
               <a:buNone/>
             </a:pPr>
             <a:r>
+              <a:rPr lang="en-US" sz="900" b="1" dirty="0">
+                <a:solidFill>
+                  <a:srgbClr val="4B5563"/>
+                </a:solidFill>
+              </a:rPr>
+              <a:t>• 垂直吸粉: </a:t>
+            </a:r>
+            <a:r>
               <a:rPr lang="en-US" sz="900" dirty="0">
                 <a:solidFill>
                   <a:srgbClr val="4B5563"/>
                 </a:solidFill>
               </a:rPr>
-              <a:t>具备 B 站长线叙事能力（无推流 Vlog 获 4.5 万播放）。熟练使用 DaVinci/剪映，熟悉 Sora 等 AI 工具。</a:t>
+              <a:t>针对音乐/ACG 区受众，发布架子鼓翻奏视频。3 条视频获得 2 万+ 播放。</a:t>
             </a:r>
             <a:endParaRPr lang="en-US" sz="900" dirty="0"/>
           </a:p>
@@ -1809,26 +2302,130 @@
       </p:sp>
       <p:sp>
         <p:nvSpPr>
-          <p:cNvPr id="27" name="Text 25"/>
-          <p:cNvSpPr/>
-          <p:nvPr/>
-        </p:nvSpPr>
-        <p:spPr>
-          <a:xfrm>
-            <a:off x="2743200" y="1581912"/>
-            <a:ext cx="4480560" cy="329184"/>
-          </a:xfrm>
-          <a:prstGeom prst="rect">
-            <a:avLst/>
-          </a:prstGeom>
-          <a:noFill/>
-          <a:ln/>
+          <p:cNvPr id="40" name="Text 38"/>
+          <p:cNvSpPr/>
+          <p:nvPr/>
+        </p:nvSpPr>
+        <p:spPr>
+          <a:xfrm>
+            <a:off x="2743200" y="5486400"/>
+            <a:ext cx="2834640" cy="182880"/>
+          </a:xfrm>
+          <a:prstGeom prst="rect">
+            <a:avLst/>
+          </a:prstGeom>
+          <a:noFill/>
+        </p:spPr>
+        <p:txBody>
+          <a:bodyPr wrap="square" rtlCol="0" anchor="ctr"/>
+          <a:lstStyle/>
+          <a:p>
+            <a:pPr marL="0" indent="0">
+              <a:buNone/>
+            </a:pPr>
+            <a:r>
+              <a:rPr lang="en-US" sz="1050" b="1" dirty="0">
+                <a:solidFill>
+                  <a:srgbClr val="1F2937"/>
+                </a:solidFill>
+              </a:rPr>
+              <a:t>“小兰花”（百万级网红）团队</a:t>
+            </a:r>
+            <a:endParaRPr lang="en-US" sz="1050" dirty="0"/>
+          </a:p>
+        </p:txBody>
+      </p:sp>
+      <p:sp>
+        <p:nvSpPr>
+          <p:cNvPr id="41" name="Text 39"/>
+          <p:cNvSpPr/>
+          <p:nvPr/>
+        </p:nvSpPr>
+        <p:spPr>
+          <a:xfrm>
+            <a:off x="5577840" y="5486400"/>
+            <a:ext cx="1645920" cy="182880"/>
+          </a:xfrm>
+          <a:prstGeom prst="rect">
+            <a:avLst/>
+          </a:prstGeom>
+          <a:noFill/>
+        </p:spPr>
+        <p:txBody>
+          <a:bodyPr wrap="square" rtlCol="0" anchor="ctr"/>
+          <a:lstStyle/>
+          <a:p>
+            <a:pPr marL="0" indent="0" algn="r">
+              <a:buNone/>
+            </a:pPr>
+            <a:r>
+              <a:rPr lang="en-US" sz="900" dirty="0">
+                <a:solidFill>
+                  <a:srgbClr val="6B7280"/>
+                </a:solidFill>
+              </a:rPr>
+              <a:t>2024.01 - 2024.12</a:t>
+            </a:r>
+            <a:endParaRPr lang="en-US" sz="900" dirty="0"/>
+          </a:p>
+        </p:txBody>
+      </p:sp>
+      <p:sp>
+        <p:nvSpPr>
+          <p:cNvPr id="42" name="Text 40"/>
+          <p:cNvSpPr/>
+          <p:nvPr/>
+        </p:nvSpPr>
+        <p:spPr>
+          <a:xfrm>
+            <a:off x="2743200" y="5669280"/>
+            <a:ext cx="4480560" cy="182880"/>
+          </a:xfrm>
+          <a:prstGeom prst="rect">
+            <a:avLst/>
+          </a:prstGeom>
+          <a:noFill/>
+        </p:spPr>
+        <p:txBody>
+          <a:bodyPr wrap="square" rtlCol="0" anchor="ctr"/>
+          <a:lstStyle/>
+          <a:p>
+            <a:pPr marL="0" indent="0">
+              <a:buNone/>
+            </a:pPr>
+            <a:r>
+              <a:rPr lang="en-US" sz="950" i="1" dirty="0">
+                <a:solidFill>
+                  <a:srgbClr val="4B5563"/>
+                </a:solidFill>
+              </a:rPr>
+              <a:t>社群管理</a:t>
+            </a:r>
+            <a:endParaRPr lang="en-US" sz="950" dirty="0"/>
+          </a:p>
+        </p:txBody>
+      </p:sp>
+      <p:sp>
+        <p:nvSpPr>
+          <p:cNvPr id="43" name="Text 41"/>
+          <p:cNvSpPr/>
+          <p:nvPr/>
+        </p:nvSpPr>
+        <p:spPr>
+          <a:xfrm>
+            <a:off x="2834640" y="5870448"/>
+            <a:ext cx="4389120" cy="329184"/>
+          </a:xfrm>
+          <a:prstGeom prst="rect">
+            <a:avLst/>
+          </a:prstGeom>
+          <a:noFill/>
         </p:spPr>
         <p:txBody>
           <a:bodyPr wrap="square" rtlCol="0" anchor="t"/>
           <a:lstStyle/>
           <a:p>
-            <a:pPr indent="0" marL="0">
+            <a:pPr marL="0" indent="0">
               <a:lnSpc>
                 <a:spcPts val="1200"/>
               </a:lnSpc>
@@ -1837,24 +2434,64 @@
             <a:r>
               <a:rPr lang="en-US" sz="900" b="1" dirty="0">
                 <a:solidFill>
-                  <a:srgbClr val="1F2937"/>
-                </a:solidFill>
-              </a:rPr>
-              <a:t>社群运营与维护  |  </a:t>
-            </a:r>
-            <a:pPr indent="0" marL="0">
+                  <a:srgbClr val="4B5563"/>
+                </a:solidFill>
+              </a:rPr>
+              <a:t>• 粉丝维系: </a:t>
+            </a:r>
+            <a:r>
+              <a:rPr lang="en-US" sz="900" dirty="0">
+                <a:solidFill>
+                  <a:srgbClr val="4B5563"/>
+                </a:solidFill>
+              </a:rPr>
+              <a:t>担任百万粉博主群管，负责抛出日常话题、引导讨论并维系主要粉丝关系。</a:t>
+            </a:r>
+            <a:endParaRPr lang="en-US" sz="900" dirty="0"/>
+          </a:p>
+        </p:txBody>
+      </p:sp>
+      <p:sp>
+        <p:nvSpPr>
+          <p:cNvPr id="44" name="Text 42"/>
+          <p:cNvSpPr/>
+          <p:nvPr/>
+        </p:nvSpPr>
+        <p:spPr>
+          <a:xfrm>
+            <a:off x="2834640" y="6245352"/>
+            <a:ext cx="4389120" cy="329184"/>
+          </a:xfrm>
+          <a:prstGeom prst="rect">
+            <a:avLst/>
+          </a:prstGeom>
+          <a:noFill/>
+        </p:spPr>
+        <p:txBody>
+          <a:bodyPr wrap="square" rtlCol="0" anchor="t"/>
+          <a:lstStyle/>
+          <a:p>
+            <a:pPr marL="0" indent="0">
               <a:lnSpc>
                 <a:spcPts val="1200"/>
               </a:lnSpc>
               <a:buNone/>
             </a:pPr>
             <a:r>
+              <a:rPr lang="en-US" sz="900" b="1" dirty="0">
+                <a:solidFill>
+                  <a:srgbClr val="4B5563"/>
+                </a:solidFill>
+              </a:rPr>
+              <a:t>• 危机控制: </a:t>
+            </a:r>
+            <a:r>
               <a:rPr lang="en-US" sz="900" dirty="0">
                 <a:solidFill>
                   <a:srgbClr val="4B5563"/>
                 </a:solidFill>
               </a:rPr>
-              <a:t>协助管理百万粉网红社群，具突发事件处理能力。化解社群意见分歧，维护良好氛围。</a:t>
+              <a:t>处理直播间封禁引发的风波，协同博主发布声明，2小时内平息。调解新老粉丝冲突。</a:t>
             </a:r>
             <a:endParaRPr lang="en-US" sz="900" dirty="0"/>
           </a:p>
@@ -1862,40 +2499,211 @@
       </p:sp>
       <p:sp>
         <p:nvSpPr>
-          <p:cNvPr id="28" name="Text 26"/>
-          <p:cNvSpPr/>
-          <p:nvPr/>
-        </p:nvSpPr>
-        <p:spPr>
-          <a:xfrm>
-            <a:off x="2743200" y="1984248"/>
-            <a:ext cx="4480560" cy="329184"/>
-          </a:xfrm>
-          <a:prstGeom prst="rect">
-            <a:avLst/>
-          </a:prstGeom>
-          <a:noFill/>
-          <a:ln/>
+          <p:cNvPr id="45" name="Text 43"/>
+          <p:cNvSpPr/>
+          <p:nvPr/>
+        </p:nvSpPr>
+        <p:spPr>
+          <a:xfrm>
+            <a:off x="2743200" y="6757416"/>
+            <a:ext cx="4480560" cy="228600"/>
+          </a:xfrm>
+          <a:prstGeom prst="rect">
+            <a:avLst/>
+          </a:prstGeom>
+          <a:noFill/>
+        </p:spPr>
+        <p:txBody>
+          <a:bodyPr wrap="square" rtlCol="0" anchor="ctr"/>
+          <a:lstStyle/>
+          <a:p>
+            <a:pPr marL="0" indent="0">
+              <a:buNone/>
+            </a:pPr>
+            <a:r>
+              <a:rPr lang="en-US" sz="1400" b="1" dirty="0">
+                <a:solidFill>
+                  <a:srgbClr val="3B82F6"/>
+                </a:solidFill>
+              </a:rPr>
+              <a:t>校园经历与荣誉</a:t>
+            </a:r>
+            <a:endParaRPr lang="en-US" sz="1400" dirty="0"/>
+          </a:p>
+        </p:txBody>
+      </p:sp>
+      <p:sp>
+        <p:nvSpPr>
+          <p:cNvPr id="46" name="Text 44"/>
+          <p:cNvSpPr/>
+          <p:nvPr/>
+        </p:nvSpPr>
+        <p:spPr>
+          <a:xfrm>
+            <a:off x="2743200" y="7077456"/>
+            <a:ext cx="2834640" cy="182880"/>
+          </a:xfrm>
+          <a:prstGeom prst="rect">
+            <a:avLst/>
+          </a:prstGeom>
+          <a:noFill/>
+        </p:spPr>
+        <p:txBody>
+          <a:bodyPr wrap="square" rtlCol="0" anchor="ctr"/>
+          <a:lstStyle/>
+          <a:p>
+            <a:pPr marL="0" indent="0">
+              <a:buNone/>
+            </a:pPr>
+            <a:r>
+              <a:rPr lang="en-US" sz="1050" b="1" dirty="0">
+                <a:solidFill>
+                  <a:srgbClr val="1F2937"/>
+                </a:solidFill>
+              </a:rPr>
+              <a:t>新媒体账号“河师大教育学部”</a:t>
+            </a:r>
+            <a:endParaRPr lang="en-US" sz="1050" dirty="0"/>
+          </a:p>
+        </p:txBody>
+      </p:sp>
+      <p:sp>
+        <p:nvSpPr>
+          <p:cNvPr id="47" name="Text 45"/>
+          <p:cNvSpPr/>
+          <p:nvPr/>
+        </p:nvSpPr>
+        <p:spPr>
+          <a:xfrm>
+            <a:off x="5577840" y="7077456"/>
+            <a:ext cx="1645920" cy="182880"/>
+          </a:xfrm>
+          <a:prstGeom prst="rect">
+            <a:avLst/>
+          </a:prstGeom>
+          <a:noFill/>
+        </p:spPr>
+        <p:txBody>
+          <a:bodyPr wrap="square" rtlCol="0" anchor="ctr"/>
+          <a:lstStyle/>
+          <a:p>
+            <a:pPr marL="0" indent="0" algn="r">
+              <a:buNone/>
+            </a:pPr>
+            <a:r>
+              <a:rPr lang="en-US" sz="900" dirty="0">
+                <a:solidFill>
+                  <a:srgbClr val="6B7280"/>
+                </a:solidFill>
+              </a:rPr>
+              <a:t>2021.09 - 2024.05</a:t>
+            </a:r>
+            <a:endParaRPr lang="en-US" sz="900" dirty="0"/>
+          </a:p>
+        </p:txBody>
+      </p:sp>
+      <p:sp>
+        <p:nvSpPr>
+          <p:cNvPr id="48" name="Text 46"/>
+          <p:cNvSpPr/>
+          <p:nvPr/>
+        </p:nvSpPr>
+        <p:spPr>
+          <a:xfrm>
+            <a:off x="2743200" y="7260336"/>
+            <a:ext cx="4480560" cy="182880"/>
+          </a:xfrm>
+          <a:prstGeom prst="rect">
+            <a:avLst/>
+          </a:prstGeom>
+          <a:noFill/>
+        </p:spPr>
+        <p:txBody>
+          <a:bodyPr wrap="square" rtlCol="0" anchor="ctr"/>
+          <a:lstStyle/>
+          <a:p>
+            <a:pPr marL="0" indent="0">
+              <a:buNone/>
+            </a:pPr>
+            <a:r>
+              <a:rPr lang="en-US" sz="950" i="1" dirty="0">
+                <a:solidFill>
+                  <a:srgbClr val="4B5563"/>
+                </a:solidFill>
+              </a:rPr>
+              <a:t>运营统筹</a:t>
+            </a:r>
+            <a:endParaRPr lang="en-US" sz="950" dirty="0"/>
+          </a:p>
+        </p:txBody>
+      </p:sp>
+      <p:sp>
+        <p:nvSpPr>
+          <p:cNvPr id="49" name="Text 47"/>
+          <p:cNvSpPr/>
+          <p:nvPr/>
+        </p:nvSpPr>
+        <p:spPr>
+          <a:xfrm>
+            <a:off x="2834640" y="7461504"/>
+            <a:ext cx="4389120" cy="164592"/>
+          </a:xfrm>
+          <a:prstGeom prst="rect">
+            <a:avLst/>
+          </a:prstGeom>
+          <a:noFill/>
         </p:spPr>
         <p:txBody>
           <a:bodyPr wrap="square" rtlCol="0" anchor="t"/>
           <a:lstStyle/>
           <a:p>
-            <a:pPr indent="0" marL="0">
+            <a:pPr marL="0" indent="0">
               <a:lnSpc>
                 <a:spcPts val="1200"/>
               </a:lnSpc>
               <a:buNone/>
             </a:pPr>
             <a:r>
-              <a:rPr lang="en-US" sz="900" b="1" dirty="0">
-                <a:solidFill>
-                  <a:srgbClr val="1F2937"/>
-                </a:solidFill>
-              </a:rPr>
-              <a:t>数据分析与洞察  |  </a:t>
-            </a:r>
-            <a:pPr indent="0" marL="0">
+              <a:rPr lang="en-US" sz="900" dirty="0">
+                <a:solidFill>
+                  <a:srgbClr val="4B5563"/>
+                </a:solidFill>
+              </a:rPr>
+              <a:t>• </a:t>
+            </a:r>
+            <a:r>
+              <a:rPr lang="en-US" sz="900" dirty="0">
+                <a:solidFill>
+                  <a:srgbClr val="4B5563"/>
+                </a:solidFill>
+              </a:rPr>
+              <a:t>审核视频脚本、指导拍摄并把控最终成片质量。</a:t>
+            </a:r>
+            <a:endParaRPr lang="en-US" sz="900" dirty="0"/>
+          </a:p>
+        </p:txBody>
+      </p:sp>
+      <p:sp>
+        <p:nvSpPr>
+          <p:cNvPr id="50" name="Text 48"/>
+          <p:cNvSpPr/>
+          <p:nvPr/>
+        </p:nvSpPr>
+        <p:spPr>
+          <a:xfrm>
+            <a:off x="2834640" y="7671816"/>
+            <a:ext cx="4389120" cy="164592"/>
+          </a:xfrm>
+          <a:prstGeom prst="rect">
+            <a:avLst/>
+          </a:prstGeom>
+          <a:noFill/>
+        </p:spPr>
+        <p:txBody>
+          <a:bodyPr wrap="square" rtlCol="0" anchor="t"/>
+          <a:lstStyle/>
+          <a:p>
+            <a:pPr marL="0" indent="0">
               <a:lnSpc>
                 <a:spcPts val="1200"/>
               </a:lnSpc>
@@ -1907,7 +2715,15 @@
                   <a:srgbClr val="4B5563"/>
                 </a:solidFill>
               </a:rPr>
-              <a:t>心理学背景，熟练使用 SPSS 进行数据分析。曾通过 A/B 测试量化分析配乐对受众情绪的影响。</a:t>
+              <a:t>• </a:t>
+            </a:r>
+            <a:r>
+              <a:rPr lang="en-US" sz="900" dirty="0">
+                <a:solidFill>
+                  <a:srgbClr val="4B5563"/>
+                </a:solidFill>
+              </a:rPr>
+              <a:t>结合高考热点策划学部宣传片，取得年度最佳曝光。</a:t>
             </a:r>
             <a:endParaRPr lang="en-US" sz="900" dirty="0"/>
           </a:p>
@@ -1915,62 +2731,25 @@
       </p:sp>
       <p:sp>
         <p:nvSpPr>
-          <p:cNvPr id="29" name="Text 27"/>
-          <p:cNvSpPr/>
-          <p:nvPr/>
-        </p:nvSpPr>
-        <p:spPr>
-          <a:xfrm>
-            <a:off x="2743200" y="2478024"/>
-            <a:ext cx="4480560" cy="228600"/>
-          </a:xfrm>
-          <a:prstGeom prst="rect">
-            <a:avLst/>
-          </a:prstGeom>
-          <a:noFill/>
-          <a:ln/>
-        </p:spPr>
-        <p:txBody>
-          <a:bodyPr wrap="square" rtlCol="0" anchor="ctr"/>
-          <a:lstStyle/>
-          <a:p>
-            <a:pPr indent="0" marL="0">
-              <a:buNone/>
-            </a:pPr>
-            <a:r>
-              <a:rPr lang="en-US" sz="1400" b="1" dirty="0">
-                <a:solidFill>
-                  <a:srgbClr val="3B82F6"/>
-                </a:solidFill>
-              </a:rPr>
-              <a:t>项目与工作经历</a:t>
-            </a:r>
-            <a:endParaRPr lang="en-US" sz="1400" dirty="0"/>
-          </a:p>
-        </p:txBody>
-      </p:sp>
-      <p:sp>
-        <p:nvSpPr>
-          <p:cNvPr id="30" name="Text 28"/>
-          <p:cNvSpPr/>
-          <p:nvPr/>
-        </p:nvSpPr>
-        <p:spPr>
-          <a:xfrm>
-            <a:off x="2743200" y="2798064"/>
+          <p:cNvPr id="51" name="Text 49"/>
+          <p:cNvSpPr/>
+          <p:nvPr/>
+        </p:nvSpPr>
+        <p:spPr>
+          <a:xfrm>
+            <a:off x="2743200" y="8019288"/>
             <a:ext cx="2834640" cy="182880"/>
           </a:xfrm>
           <a:prstGeom prst="rect">
             <a:avLst/>
           </a:prstGeom>
           <a:noFill/>
-          <a:ln/>
-        </p:spPr>
-        <p:txBody>
-          <a:bodyPr wrap="square" rtlCol="0" anchor="ctr"/>
-          <a:lstStyle/>
-          <a:p>
-            <a:pPr indent="0" marL="0">
+        </p:spPr>
+        <p:txBody>
+          <a:bodyPr wrap="square" rtlCol="0" anchor="ctr"/>
+          <a:lstStyle/>
+          <a:p>
+            <a:pPr marL="0" indent="0">
               <a:buNone/>
             </a:pPr>
             <a:r>
@@ -1979,7 +2758,7 @@
                   <a:srgbClr val="1F2937"/>
                 </a:solidFill>
               </a:rPr>
-              <a:t>抖音平台 / 泛二次元内容创作者</a:t>
+              <a:t>校级宣传视频《百年征程》</a:t>
             </a:r>
             <a:endParaRPr lang="en-US" sz="1050" dirty="0"/>
           </a:p>
@@ -1987,26 +2766,25 @@
       </p:sp>
       <p:sp>
         <p:nvSpPr>
-          <p:cNvPr id="31" name="Text 29"/>
-          <p:cNvSpPr/>
-          <p:nvPr/>
-        </p:nvSpPr>
-        <p:spPr>
-          <a:xfrm>
-            <a:off x="5577840" y="2798064"/>
+          <p:cNvPr id="52" name="Text 50"/>
+          <p:cNvSpPr/>
+          <p:nvPr/>
+        </p:nvSpPr>
+        <p:spPr>
+          <a:xfrm>
+            <a:off x="5577840" y="8019288"/>
             <a:ext cx="1645920" cy="182880"/>
           </a:xfrm>
           <a:prstGeom prst="rect">
             <a:avLst/>
           </a:prstGeom>
           <a:noFill/>
-          <a:ln/>
-        </p:spPr>
-        <p:txBody>
-          <a:bodyPr wrap="square" rtlCol="0" anchor="ctr"/>
-          <a:lstStyle/>
-          <a:p>
-            <a:pPr algn="r" indent="0" marL="0">
+        </p:spPr>
+        <p:txBody>
+          <a:bodyPr wrap="square" rtlCol="0" anchor="ctr"/>
+          <a:lstStyle/>
+          <a:p>
+            <a:pPr marL="0" indent="0" algn="r">
               <a:buNone/>
             </a:pPr>
             <a:r>
@@ -2015,7 +2793,7 @@
                   <a:srgbClr val="6B7280"/>
                 </a:solidFill>
               </a:rPr>
-              <a:t>2019.05 - 2021.01</a:t>
+              <a:t>2023.05 - 2023.07</a:t>
             </a:r>
             <a:endParaRPr lang="en-US" sz="900" dirty="0"/>
           </a:p>
@@ -2023,26 +2801,25 @@
       </p:sp>
       <p:sp>
         <p:nvSpPr>
-          <p:cNvPr id="32" name="Text 30"/>
-          <p:cNvSpPr/>
-          <p:nvPr/>
-        </p:nvSpPr>
-        <p:spPr>
-          <a:xfrm>
-            <a:off x="2743200" y="2980944"/>
+          <p:cNvPr id="53" name="Text 51"/>
+          <p:cNvSpPr/>
+          <p:nvPr/>
+        </p:nvSpPr>
+        <p:spPr>
+          <a:xfrm>
+            <a:off x="2743200" y="8202168"/>
             <a:ext cx="4480560" cy="182880"/>
           </a:xfrm>
           <a:prstGeom prst="rect">
             <a:avLst/>
           </a:prstGeom>
           <a:noFill/>
-          <a:ln/>
-        </p:spPr>
-        <p:txBody>
-          <a:bodyPr wrap="square" rtlCol="0" anchor="ctr"/>
-          <a:lstStyle/>
-          <a:p>
-            <a:pPr indent="0" marL="0">
+        </p:spPr>
+        <p:txBody>
+          <a:bodyPr wrap="square" rtlCol="0" anchor="ctr"/>
+          <a:lstStyle/>
+          <a:p>
+            <a:pPr marL="0" indent="0">
               <a:buNone/>
             </a:pPr>
             <a:r>
@@ -2051,7 +2828,7 @@
                   <a:srgbClr val="4B5563"/>
                 </a:solidFill>
               </a:rPr>
-              <a:t>个人项目</a:t>
+              <a:t>后期制作</a:t>
             </a:r>
             <a:endParaRPr lang="en-US" sz="950" dirty="0"/>
           </a:p>
@@ -2059,40 +2836,176 @@
       </p:sp>
       <p:sp>
         <p:nvSpPr>
-          <p:cNvPr id="33" name="Text 31"/>
-          <p:cNvSpPr/>
-          <p:nvPr/>
-        </p:nvSpPr>
-        <p:spPr>
-          <a:xfrm>
-            <a:off x="2834640" y="3182112"/>
+          <p:cNvPr id="54" name="Text 52"/>
+          <p:cNvSpPr/>
+          <p:nvPr/>
+        </p:nvSpPr>
+        <p:spPr>
+          <a:xfrm>
+            <a:off x="2834640" y="8403336"/>
             <a:ext cx="4389120" cy="329184"/>
           </a:xfrm>
           <a:prstGeom prst="rect">
             <a:avLst/>
           </a:prstGeom>
           <a:noFill/>
-          <a:ln/>
         </p:spPr>
         <p:txBody>
           <a:bodyPr wrap="square" rtlCol="0" anchor="t"/>
           <a:lstStyle/>
           <a:p>
-            <a:pPr indent="0" marL="0">
+            <a:pPr marL="0" indent="0">
               <a:lnSpc>
                 <a:spcPts val="1200"/>
               </a:lnSpc>
               <a:buNone/>
             </a:pPr>
             <a:r>
-              <a:rPr lang="en-US" sz="900" b="1" dirty="0">
-                <a:solidFill>
-                  <a:srgbClr val="4B5563"/>
-                </a:solidFill>
-              </a:rPr>
-              <a:t>• 爆款策划: </a:t>
-            </a:r>
-            <a:pPr indent="0" marL="0">
+              <a:rPr lang="en-US" sz="900" dirty="0">
+                <a:solidFill>
+                  <a:srgbClr val="4B5563"/>
+                </a:solidFill>
+              </a:rPr>
+              <a:t>• </a:t>
+            </a:r>
+            <a:r>
+              <a:rPr lang="en-US" sz="900" dirty="0">
+                <a:solidFill>
+                  <a:srgbClr val="4B5563"/>
+                </a:solidFill>
+              </a:rPr>
+              <a:t>使用 Adobe AE 制作特效，DaVinci Resolve 调色。作品获校级特等奖。</a:t>
+            </a:r>
+            <a:endParaRPr lang="en-US" sz="900" dirty="0"/>
+          </a:p>
+        </p:txBody>
+      </p:sp>
+      <p:sp>
+        <p:nvSpPr>
+          <p:cNvPr id="55" name="Text 53"/>
+          <p:cNvSpPr/>
+          <p:nvPr/>
+        </p:nvSpPr>
+        <p:spPr>
+          <a:xfrm>
+            <a:off x="2743200" y="8915400"/>
+            <a:ext cx="2834640" cy="182880"/>
+          </a:xfrm>
+          <a:prstGeom prst="rect">
+            <a:avLst/>
+          </a:prstGeom>
+          <a:noFill/>
+        </p:spPr>
+        <p:txBody>
+          <a:bodyPr wrap="square" rtlCol="0" anchor="ctr"/>
+          <a:lstStyle/>
+          <a:p>
+            <a:pPr marL="0" indent="0">
+              <a:buNone/>
+            </a:pPr>
+            <a:r>
+              <a:rPr lang="en-US" sz="1050" b="1" dirty="0">
+                <a:solidFill>
+                  <a:srgbClr val="1F2937"/>
+                </a:solidFill>
+              </a:rPr>
+              <a:t>“游戏配乐与玩家情绪”研究</a:t>
+            </a:r>
+            <a:endParaRPr lang="en-US" sz="1050" dirty="0"/>
+          </a:p>
+        </p:txBody>
+      </p:sp>
+      <p:sp>
+        <p:nvSpPr>
+          <p:cNvPr id="56" name="Text 54"/>
+          <p:cNvSpPr/>
+          <p:nvPr/>
+        </p:nvSpPr>
+        <p:spPr>
+          <a:xfrm>
+            <a:off x="5577840" y="8915400"/>
+            <a:ext cx="1645920" cy="182880"/>
+          </a:xfrm>
+          <a:prstGeom prst="rect">
+            <a:avLst/>
+          </a:prstGeom>
+          <a:noFill/>
+        </p:spPr>
+        <p:txBody>
+          <a:bodyPr wrap="square" rtlCol="0" anchor="ctr"/>
+          <a:lstStyle/>
+          <a:p>
+            <a:pPr marL="0" indent="0" algn="r">
+              <a:buNone/>
+            </a:pPr>
+            <a:r>
+              <a:rPr lang="en-US" sz="900" dirty="0">
+                <a:solidFill>
+                  <a:srgbClr val="6B7280"/>
+                </a:solidFill>
+              </a:rPr>
+              <a:t>2022.01 - 2024.05</a:t>
+            </a:r>
+            <a:endParaRPr lang="en-US" sz="900" dirty="0"/>
+          </a:p>
+        </p:txBody>
+      </p:sp>
+      <p:sp>
+        <p:nvSpPr>
+          <p:cNvPr id="57" name="Text 55"/>
+          <p:cNvSpPr/>
+          <p:nvPr/>
+        </p:nvSpPr>
+        <p:spPr>
+          <a:xfrm>
+            <a:off x="2743200" y="9098280"/>
+            <a:ext cx="4480560" cy="182880"/>
+          </a:xfrm>
+          <a:prstGeom prst="rect">
+            <a:avLst/>
+          </a:prstGeom>
+          <a:noFill/>
+        </p:spPr>
+        <p:txBody>
+          <a:bodyPr wrap="square" rtlCol="0" anchor="ctr"/>
+          <a:lstStyle/>
+          <a:p>
+            <a:pPr marL="0" indent="0">
+              <a:buNone/>
+            </a:pPr>
+            <a:r>
+              <a:rPr lang="en-US" sz="950" i="1" dirty="0">
+                <a:solidFill>
+                  <a:srgbClr val="4B5563"/>
+                </a:solidFill>
+              </a:rPr>
+              <a:t>大创项目（组长）</a:t>
+            </a:r>
+            <a:endParaRPr lang="en-US" sz="950" dirty="0"/>
+          </a:p>
+        </p:txBody>
+      </p:sp>
+      <p:sp>
+        <p:nvSpPr>
+          <p:cNvPr id="58" name="Text 56"/>
+          <p:cNvSpPr/>
+          <p:nvPr/>
+        </p:nvSpPr>
+        <p:spPr>
+          <a:xfrm>
+            <a:off x="2834640" y="9299448"/>
+            <a:ext cx="4389120" cy="164592"/>
+          </a:xfrm>
+          <a:prstGeom prst="rect">
+            <a:avLst/>
+          </a:prstGeom>
+          <a:noFill/>
+        </p:spPr>
+        <p:txBody>
+          <a:bodyPr wrap="square" rtlCol="0" anchor="t"/>
+          <a:lstStyle/>
+          <a:p>
+            <a:pPr marL="0" indent="0">
               <a:lnSpc>
                 <a:spcPts val="1200"/>
               </a:lnSpc>
@@ -2104,7 +3017,15 @@
                   <a:srgbClr val="4B5563"/>
                 </a:solidFill>
               </a:rPr>
-              <a:t>预测 ACG 圈层“转生类”题材热度，结合卡点剪辑，产出两条播放破千万、点赞破百万视频。</a:t>
+              <a:t>• </a:t>
+            </a:r>
+            <a:r>
+              <a:rPr lang="en-US" sz="900" dirty="0">
+                <a:solidFill>
+                  <a:srgbClr val="4B5563"/>
+                </a:solidFill>
+              </a:rPr>
+              <a:t>设计测试情境，通过定量分析得出3节拍快节奏配乐更能激发玩家情绪的结论。</a:t>
             </a:r>
             <a:endParaRPr lang="en-US" sz="900" dirty="0"/>
           </a:p>
@@ -2112,1206 +3033,143 @@
       </p:sp>
       <p:sp>
         <p:nvSpPr>
-          <p:cNvPr id="34" name="Text 32"/>
-          <p:cNvSpPr/>
-          <p:nvPr/>
-        </p:nvSpPr>
-        <p:spPr>
-          <a:xfrm>
-            <a:off x="2834640" y="3557016"/>
+          <p:cNvPr id="59" name="Text 57"/>
+          <p:cNvSpPr/>
+          <p:nvPr/>
+        </p:nvSpPr>
+        <p:spPr>
+          <a:xfrm>
+            <a:off x="2743200" y="9646920"/>
+            <a:ext cx="2834640" cy="182880"/>
+          </a:xfrm>
+          <a:prstGeom prst="rect">
+            <a:avLst/>
+          </a:prstGeom>
+          <a:noFill/>
+        </p:spPr>
+        <p:txBody>
+          <a:bodyPr wrap="square" rtlCol="0" anchor="ctr"/>
+          <a:lstStyle/>
+          <a:p>
+            <a:pPr marL="0" indent="0">
+              <a:buNone/>
+            </a:pPr>
+            <a:r>
+              <a:rPr lang="en-US" sz="1050" b="1" dirty="0">
+                <a:solidFill>
+                  <a:srgbClr val="1F2937"/>
+                </a:solidFill>
+              </a:rPr>
+              <a:t>心理教师（实习）</a:t>
+            </a:r>
+            <a:endParaRPr lang="en-US" sz="1050" dirty="0"/>
+          </a:p>
+        </p:txBody>
+      </p:sp>
+      <p:sp>
+        <p:nvSpPr>
+          <p:cNvPr id="60" name="Text 58"/>
+          <p:cNvSpPr/>
+          <p:nvPr/>
+        </p:nvSpPr>
+        <p:spPr>
+          <a:xfrm>
+            <a:off x="5577840" y="9646920"/>
+            <a:ext cx="1645920" cy="182880"/>
+          </a:xfrm>
+          <a:prstGeom prst="rect">
+            <a:avLst/>
+          </a:prstGeom>
+          <a:noFill/>
+        </p:spPr>
+        <p:txBody>
+          <a:bodyPr wrap="square" rtlCol="0" anchor="ctr"/>
+          <a:lstStyle/>
+          <a:p>
+            <a:pPr marL="0" indent="0" algn="r">
+              <a:buNone/>
+            </a:pPr>
+            <a:r>
+              <a:rPr lang="en-US" sz="900" dirty="0">
+                <a:solidFill>
+                  <a:srgbClr val="6B7280"/>
+                </a:solidFill>
+              </a:rPr>
+              <a:t>2024.02 - 2024.06</a:t>
+            </a:r>
+            <a:endParaRPr lang="en-US" sz="900" dirty="0"/>
+          </a:p>
+        </p:txBody>
+      </p:sp>
+      <p:sp>
+        <p:nvSpPr>
+          <p:cNvPr id="61" name="Text 59"/>
+          <p:cNvSpPr/>
+          <p:nvPr/>
+        </p:nvSpPr>
+        <p:spPr>
+          <a:xfrm>
+            <a:off x="2743200" y="9829800"/>
+            <a:ext cx="4480560" cy="182880"/>
+          </a:xfrm>
+          <a:prstGeom prst="rect">
+            <a:avLst/>
+          </a:prstGeom>
+          <a:noFill/>
+        </p:spPr>
+        <p:txBody>
+          <a:bodyPr wrap="square" rtlCol="0" anchor="ctr"/>
+          <a:lstStyle/>
+          <a:p>
+            <a:pPr marL="0" indent="0">
+              <a:buNone/>
+            </a:pPr>
+            <a:r>
+              <a:rPr lang="en-US" sz="950" i="1" dirty="0">
+                <a:solidFill>
+                  <a:srgbClr val="4B5563"/>
+                </a:solidFill>
+              </a:rPr>
+              <a:t>郑州实验外国语学校</a:t>
+            </a:r>
+            <a:endParaRPr lang="en-US" sz="950" dirty="0"/>
+          </a:p>
+        </p:txBody>
+      </p:sp>
+      <p:sp>
+        <p:nvSpPr>
+          <p:cNvPr id="62" name="Text 60"/>
+          <p:cNvSpPr/>
+          <p:nvPr/>
+        </p:nvSpPr>
+        <p:spPr>
+          <a:xfrm>
+            <a:off x="2834640" y="10030968"/>
             <a:ext cx="4389120" cy="329184"/>
           </a:xfrm>
           <a:prstGeom prst="rect">
             <a:avLst/>
           </a:prstGeom>
           <a:noFill/>
-          <a:ln/>
         </p:spPr>
         <p:txBody>
           <a:bodyPr wrap="square" rtlCol="0" anchor="t"/>
           <a:lstStyle/>
           <a:p>
-            <a:pPr indent="0" marL="0">
+            <a:pPr marL="0" indent="0">
               <a:lnSpc>
                 <a:spcPts val="1200"/>
               </a:lnSpc>
               <a:buNone/>
             </a:pPr>
             <a:r>
-              <a:rPr lang="en-US" sz="900" b="1" dirty="0">
-                <a:solidFill>
-                  <a:srgbClr val="4B5563"/>
-                </a:solidFill>
-              </a:rPr>
-              <a:t>• 账号变现: </a:t>
-            </a:r>
-            <a:pPr indent="0" marL="0">
-              <a:lnSpc>
-                <a:spcPts val="1200"/>
-              </a:lnSpc>
-              <a:buNone/>
-            </a:pPr>
-            <a:r>
               <a:rPr lang="en-US" sz="900" dirty="0">
                 <a:solidFill>
                   <a:srgbClr val="4B5563"/>
                 </a:solidFill>
               </a:rPr>
-              <a:t>从 0 到 1 完成账号定位和内容迭代，积累粉丝 42.1 万。后续成功将账号转手变现。</a:t>
-            </a:r>
-            <a:endParaRPr lang="en-US" sz="900" dirty="0"/>
-          </a:p>
-        </p:txBody>
-      </p:sp>
-      <p:sp>
-        <p:nvSpPr>
-          <p:cNvPr id="35" name="Text 33"/>
-          <p:cNvSpPr/>
-          <p:nvPr/>
-        </p:nvSpPr>
-        <p:spPr>
-          <a:xfrm>
-            <a:off x="2743200" y="4069080"/>
-            <a:ext cx="2834640" cy="182880"/>
-          </a:xfrm>
-          <a:prstGeom prst="rect">
-            <a:avLst/>
-          </a:prstGeom>
-          <a:noFill/>
-          <a:ln/>
-        </p:spPr>
-        <p:txBody>
-          <a:bodyPr wrap="square" rtlCol="0" anchor="ctr"/>
-          <a:lstStyle/>
-          <a:p>
-            <a:pPr indent="0" marL="0">
-              <a:buNone/>
-            </a:pPr>
-            <a:r>
-              <a:rPr lang="en-US" sz="1050" b="1" dirty="0">
-                <a:solidFill>
-                  <a:srgbClr val="1F2937"/>
-                </a:solidFill>
-              </a:rPr>
-              <a:t>B 站 / 中长视频与垂直社区创作者</a:t>
-            </a:r>
-            <a:endParaRPr lang="en-US" sz="1050" dirty="0"/>
-          </a:p>
-        </p:txBody>
-      </p:sp>
-      <p:sp>
-        <p:nvSpPr>
-          <p:cNvPr id="36" name="Text 34"/>
-          <p:cNvSpPr/>
-          <p:nvPr/>
-        </p:nvSpPr>
-        <p:spPr>
-          <a:xfrm>
-            <a:off x="5577840" y="4069080"/>
-            <a:ext cx="1645920" cy="182880"/>
-          </a:xfrm>
-          <a:prstGeom prst="rect">
-            <a:avLst/>
-          </a:prstGeom>
-          <a:noFill/>
-          <a:ln/>
-        </p:spPr>
-        <p:txBody>
-          <a:bodyPr wrap="square" rtlCol="0" anchor="ctr"/>
-          <a:lstStyle/>
-          <a:p>
-            <a:pPr algn="r" indent="0" marL="0">
-              <a:buNone/>
-            </a:pPr>
-            <a:r>
-              <a:rPr lang="en-US" sz="900" dirty="0">
-                <a:solidFill>
-                  <a:srgbClr val="6B7280"/>
-                </a:solidFill>
-              </a:rPr>
-              <a:t>2022.09 - 至今</a:t>
-            </a:r>
-            <a:endParaRPr lang="en-US" sz="900" dirty="0"/>
-          </a:p>
-        </p:txBody>
-      </p:sp>
-      <p:sp>
-        <p:nvSpPr>
-          <p:cNvPr id="37" name="Text 35"/>
-          <p:cNvSpPr/>
-          <p:nvPr/>
-        </p:nvSpPr>
-        <p:spPr>
-          <a:xfrm>
-            <a:off x="2743200" y="4251960"/>
-            <a:ext cx="4480560" cy="182880"/>
-          </a:xfrm>
-          <a:prstGeom prst="rect">
-            <a:avLst/>
-          </a:prstGeom>
-          <a:noFill/>
-          <a:ln/>
-        </p:spPr>
-        <p:txBody>
-          <a:bodyPr wrap="square" rtlCol="0" anchor="ctr"/>
-          <a:lstStyle/>
-          <a:p>
-            <a:pPr indent="0" marL="0">
-              <a:buNone/>
-            </a:pPr>
-            <a:r>
-              <a:rPr lang="en-US" sz="950" i="1" dirty="0">
-                <a:solidFill>
-                  <a:srgbClr val="4B5563"/>
-                </a:solidFill>
-              </a:rPr>
-              <a:t>个人项目</a:t>
-            </a:r>
-            <a:endParaRPr lang="en-US" sz="950" dirty="0"/>
-          </a:p>
-        </p:txBody>
-      </p:sp>
-      <p:sp>
-        <p:nvSpPr>
-          <p:cNvPr id="38" name="Text 36"/>
-          <p:cNvSpPr/>
-          <p:nvPr/>
-        </p:nvSpPr>
-        <p:spPr>
-          <a:xfrm>
-            <a:off x="2834640" y="4453128"/>
-            <a:ext cx="4389120" cy="329184"/>
-          </a:xfrm>
-          <a:prstGeom prst="rect">
-            <a:avLst/>
-          </a:prstGeom>
-          <a:noFill/>
-          <a:ln/>
-        </p:spPr>
-        <p:txBody>
-          <a:bodyPr wrap="square" rtlCol="0" anchor="t"/>
-          <a:lstStyle/>
-          <a:p>
-            <a:pPr indent="0" marL="0">
-              <a:lnSpc>
-                <a:spcPts val="1200"/>
-              </a:lnSpc>
-              <a:buNone/>
-            </a:pPr>
-            <a:r>
-              <a:rPr lang="en-US" sz="900" b="1" dirty="0">
-                <a:solidFill>
-                  <a:srgbClr val="4B5563"/>
-                </a:solidFill>
-              </a:rPr>
-              <a:t>• 长线叙事: </a:t>
-            </a:r>
-            <a:pPr indent="0" marL="0">
-              <a:lnSpc>
-                <a:spcPts val="1200"/>
-              </a:lnSpc>
-              <a:buNone/>
-            </a:pPr>
-            <a:r>
-              <a:rPr lang="en-US" sz="900" dirty="0">
-                <a:solidFill>
-                  <a:srgbClr val="4B5563"/>
-                </a:solidFill>
-              </a:rPr>
-              <a:t>策划、拍摄并剪辑 28 分钟 Vlog。无官方推荐下单条获 4.5 万播放，转化 300+ 关注。</a:t>
-            </a:r>
-            <a:endParaRPr lang="en-US" sz="900" dirty="0"/>
-          </a:p>
-        </p:txBody>
-      </p:sp>
-      <p:sp>
-        <p:nvSpPr>
-          <p:cNvPr id="39" name="Text 37"/>
-          <p:cNvSpPr/>
-          <p:nvPr/>
-        </p:nvSpPr>
-        <p:spPr>
-          <a:xfrm>
-            <a:off x="2834640" y="4828032"/>
-            <a:ext cx="4389120" cy="329184"/>
-          </a:xfrm>
-          <a:prstGeom prst="rect">
-            <a:avLst/>
-          </a:prstGeom>
-          <a:noFill/>
-          <a:ln/>
-        </p:spPr>
-        <p:txBody>
-          <a:bodyPr wrap="square" rtlCol="0" anchor="t"/>
-          <a:lstStyle/>
-          <a:p>
-            <a:pPr indent="0" marL="0">
-              <a:lnSpc>
-                <a:spcPts val="1200"/>
-              </a:lnSpc>
-              <a:buNone/>
-            </a:pPr>
-            <a:r>
-              <a:rPr lang="en-US" sz="900" b="1" dirty="0">
-                <a:solidFill>
-                  <a:srgbClr val="4B5563"/>
-                </a:solidFill>
-              </a:rPr>
-              <a:t>• 垂直吸粉: </a:t>
-            </a:r>
-            <a:pPr indent="0" marL="0">
-              <a:lnSpc>
-                <a:spcPts val="1200"/>
-              </a:lnSpc>
-              <a:buNone/>
-            </a:pPr>
-            <a:r>
-              <a:rPr lang="en-US" sz="900" dirty="0">
-                <a:solidFill>
-                  <a:srgbClr val="4B5563"/>
-                </a:solidFill>
-              </a:rPr>
-              <a:t>针对音乐/ACG 区受众，发布架子鼓翻奏视频。3 条视频获得 2 万+ 播放。</a:t>
-            </a:r>
-            <a:endParaRPr lang="en-US" sz="900" dirty="0"/>
-          </a:p>
-        </p:txBody>
-      </p:sp>
-      <p:sp>
-        <p:nvSpPr>
-          <p:cNvPr id="40" name="Text 38"/>
-          <p:cNvSpPr/>
-          <p:nvPr/>
-        </p:nvSpPr>
-        <p:spPr>
-          <a:xfrm>
-            <a:off x="2743200" y="5340096"/>
-            <a:ext cx="2834640" cy="182880"/>
-          </a:xfrm>
-          <a:prstGeom prst="rect">
-            <a:avLst/>
-          </a:prstGeom>
-          <a:noFill/>
-          <a:ln/>
-        </p:spPr>
-        <p:txBody>
-          <a:bodyPr wrap="square" rtlCol="0" anchor="ctr"/>
-          <a:lstStyle/>
-          <a:p>
-            <a:pPr indent="0" marL="0">
-              <a:buNone/>
-            </a:pPr>
-            <a:r>
-              <a:rPr lang="en-US" sz="1050" b="1" dirty="0">
-                <a:solidFill>
-                  <a:srgbClr val="1F2937"/>
-                </a:solidFill>
-              </a:rPr>
-              <a:t>“小兰花”（百万级网红）团队</a:t>
-            </a:r>
-            <a:endParaRPr lang="en-US" sz="1050" dirty="0"/>
-          </a:p>
-        </p:txBody>
-      </p:sp>
-      <p:sp>
-        <p:nvSpPr>
-          <p:cNvPr id="41" name="Text 39"/>
-          <p:cNvSpPr/>
-          <p:nvPr/>
-        </p:nvSpPr>
-        <p:spPr>
-          <a:xfrm>
-            <a:off x="5577840" y="5340096"/>
-            <a:ext cx="1645920" cy="182880"/>
-          </a:xfrm>
-          <a:prstGeom prst="rect">
-            <a:avLst/>
-          </a:prstGeom>
-          <a:noFill/>
-          <a:ln/>
-        </p:spPr>
-        <p:txBody>
-          <a:bodyPr wrap="square" rtlCol="0" anchor="ctr"/>
-          <a:lstStyle/>
-          <a:p>
-            <a:pPr algn="r" indent="0" marL="0">
-              <a:buNone/>
-            </a:pPr>
-            <a:r>
-              <a:rPr lang="en-US" sz="900" dirty="0">
-                <a:solidFill>
-                  <a:srgbClr val="6B7280"/>
-                </a:solidFill>
-              </a:rPr>
-              <a:t>2024.01 - 2024.12</a:t>
-            </a:r>
-            <a:endParaRPr lang="en-US" sz="900" dirty="0"/>
-          </a:p>
-        </p:txBody>
-      </p:sp>
-      <p:sp>
-        <p:nvSpPr>
-          <p:cNvPr id="42" name="Text 40"/>
-          <p:cNvSpPr/>
-          <p:nvPr/>
-        </p:nvSpPr>
-        <p:spPr>
-          <a:xfrm>
-            <a:off x="2743200" y="5522976"/>
-            <a:ext cx="4480560" cy="182880"/>
-          </a:xfrm>
-          <a:prstGeom prst="rect">
-            <a:avLst/>
-          </a:prstGeom>
-          <a:noFill/>
-          <a:ln/>
-        </p:spPr>
-        <p:txBody>
-          <a:bodyPr wrap="square" rtlCol="0" anchor="ctr"/>
-          <a:lstStyle/>
-          <a:p>
-            <a:pPr indent="0" marL="0">
-              <a:buNone/>
-            </a:pPr>
-            <a:r>
-              <a:rPr lang="en-US" sz="950" i="1" dirty="0">
-                <a:solidFill>
-                  <a:srgbClr val="4B5563"/>
-                </a:solidFill>
-              </a:rPr>
-              <a:t>社群管理</a:t>
-            </a:r>
-            <a:endParaRPr lang="en-US" sz="950" dirty="0"/>
-          </a:p>
-        </p:txBody>
-      </p:sp>
-      <p:sp>
-        <p:nvSpPr>
-          <p:cNvPr id="43" name="Text 41"/>
-          <p:cNvSpPr/>
-          <p:nvPr/>
-        </p:nvSpPr>
-        <p:spPr>
-          <a:xfrm>
-            <a:off x="2834640" y="5724144"/>
-            <a:ext cx="4389120" cy="329184"/>
-          </a:xfrm>
-          <a:prstGeom prst="rect">
-            <a:avLst/>
-          </a:prstGeom>
-          <a:noFill/>
-          <a:ln/>
-        </p:spPr>
-        <p:txBody>
-          <a:bodyPr wrap="square" rtlCol="0" anchor="t"/>
-          <a:lstStyle/>
-          <a:p>
-            <a:pPr indent="0" marL="0">
-              <a:lnSpc>
-                <a:spcPts val="1200"/>
-              </a:lnSpc>
-              <a:buNone/>
-            </a:pPr>
-            <a:r>
-              <a:rPr lang="en-US" sz="900" b="1" dirty="0">
-                <a:solidFill>
-                  <a:srgbClr val="4B5563"/>
-                </a:solidFill>
-              </a:rPr>
-              <a:t>• 粉丝维系: </a:t>
-            </a:r>
-            <a:pPr indent="0" marL="0">
-              <a:lnSpc>
-                <a:spcPts val="1200"/>
-              </a:lnSpc>
-              <a:buNone/>
-            </a:pPr>
-            <a:r>
-              <a:rPr lang="en-US" sz="900" dirty="0">
-                <a:solidFill>
-                  <a:srgbClr val="4B5563"/>
-                </a:solidFill>
-              </a:rPr>
-              <a:t>担任百万粉博主群管，负责抛出日常话题、引导讨论并维系主要粉丝关系。</a:t>
-            </a:r>
-            <a:endParaRPr lang="en-US" sz="900" dirty="0"/>
-          </a:p>
-        </p:txBody>
-      </p:sp>
-      <p:sp>
-        <p:nvSpPr>
-          <p:cNvPr id="44" name="Text 42"/>
-          <p:cNvSpPr/>
-          <p:nvPr/>
-        </p:nvSpPr>
-        <p:spPr>
-          <a:xfrm>
-            <a:off x="2834640" y="6099048"/>
-            <a:ext cx="4389120" cy="329184"/>
-          </a:xfrm>
-          <a:prstGeom prst="rect">
-            <a:avLst/>
-          </a:prstGeom>
-          <a:noFill/>
-          <a:ln/>
-        </p:spPr>
-        <p:txBody>
-          <a:bodyPr wrap="square" rtlCol="0" anchor="t"/>
-          <a:lstStyle/>
-          <a:p>
-            <a:pPr indent="0" marL="0">
-              <a:lnSpc>
-                <a:spcPts val="1200"/>
-              </a:lnSpc>
-              <a:buNone/>
-            </a:pPr>
-            <a:r>
-              <a:rPr lang="en-US" sz="900" b="1" dirty="0">
-                <a:solidFill>
-                  <a:srgbClr val="4B5563"/>
-                </a:solidFill>
-              </a:rPr>
-              <a:t>• 危机控制: </a:t>
-            </a:r>
-            <a:pPr indent="0" marL="0">
-              <a:lnSpc>
-                <a:spcPts val="1200"/>
-              </a:lnSpc>
-              <a:buNone/>
-            </a:pPr>
-            <a:r>
-              <a:rPr lang="en-US" sz="900" dirty="0">
-                <a:solidFill>
-                  <a:srgbClr val="4B5563"/>
-                </a:solidFill>
-              </a:rPr>
-              <a:t>处理直播间封禁引发的风波，协同博主发布声明，2小时内平息。调解新老粉丝冲突。</a:t>
-            </a:r>
-            <a:endParaRPr lang="en-US" sz="900" dirty="0"/>
-          </a:p>
-        </p:txBody>
-      </p:sp>
-      <p:sp>
-        <p:nvSpPr>
-          <p:cNvPr id="45" name="Text 43"/>
-          <p:cNvSpPr/>
-          <p:nvPr/>
-        </p:nvSpPr>
-        <p:spPr>
-          <a:xfrm>
-            <a:off x="2743200" y="6611112"/>
-            <a:ext cx="4480560" cy="228600"/>
-          </a:xfrm>
-          <a:prstGeom prst="rect">
-            <a:avLst/>
-          </a:prstGeom>
-          <a:noFill/>
-          <a:ln/>
-        </p:spPr>
-        <p:txBody>
-          <a:bodyPr wrap="square" rtlCol="0" anchor="ctr"/>
-          <a:lstStyle/>
-          <a:p>
-            <a:pPr indent="0" marL="0">
-              <a:buNone/>
-            </a:pPr>
-            <a:r>
-              <a:rPr lang="en-US" sz="1400" b="1" dirty="0">
-                <a:solidFill>
-                  <a:srgbClr val="3B82F6"/>
-                </a:solidFill>
-              </a:rPr>
-              <a:t>校园经历与荣誉</a:t>
-            </a:r>
-            <a:endParaRPr lang="en-US" sz="1400" dirty="0"/>
-          </a:p>
-        </p:txBody>
-      </p:sp>
-      <p:sp>
-        <p:nvSpPr>
-          <p:cNvPr id="46" name="Text 44"/>
-          <p:cNvSpPr/>
-          <p:nvPr/>
-        </p:nvSpPr>
-        <p:spPr>
-          <a:xfrm>
-            <a:off x="2743200" y="6931152"/>
-            <a:ext cx="2834640" cy="182880"/>
-          </a:xfrm>
-          <a:prstGeom prst="rect">
-            <a:avLst/>
-          </a:prstGeom>
-          <a:noFill/>
-          <a:ln/>
-        </p:spPr>
-        <p:txBody>
-          <a:bodyPr wrap="square" rtlCol="0" anchor="ctr"/>
-          <a:lstStyle/>
-          <a:p>
-            <a:pPr indent="0" marL="0">
-              <a:buNone/>
-            </a:pPr>
-            <a:r>
-              <a:rPr lang="en-US" sz="1050" b="1" dirty="0">
-                <a:solidFill>
-                  <a:srgbClr val="1F2937"/>
-                </a:solidFill>
-              </a:rPr>
-              <a:t>新媒体账号“河师大教育学部”</a:t>
-            </a:r>
-            <a:endParaRPr lang="en-US" sz="1050" dirty="0"/>
-          </a:p>
-        </p:txBody>
-      </p:sp>
-      <p:sp>
-        <p:nvSpPr>
-          <p:cNvPr id="47" name="Text 45"/>
-          <p:cNvSpPr/>
-          <p:nvPr/>
-        </p:nvSpPr>
-        <p:spPr>
-          <a:xfrm>
-            <a:off x="5577840" y="6931152"/>
-            <a:ext cx="1645920" cy="182880"/>
-          </a:xfrm>
-          <a:prstGeom prst="rect">
-            <a:avLst/>
-          </a:prstGeom>
-          <a:noFill/>
-          <a:ln/>
-        </p:spPr>
-        <p:txBody>
-          <a:bodyPr wrap="square" rtlCol="0" anchor="ctr"/>
-          <a:lstStyle/>
-          <a:p>
-            <a:pPr algn="r" indent="0" marL="0">
-              <a:buNone/>
-            </a:pPr>
-            <a:r>
-              <a:rPr lang="en-US" sz="900" dirty="0">
-                <a:solidFill>
-                  <a:srgbClr val="6B7280"/>
-                </a:solidFill>
-              </a:rPr>
-              <a:t>2021.09 - 2024.05</a:t>
-            </a:r>
-            <a:endParaRPr lang="en-US" sz="900" dirty="0"/>
-          </a:p>
-        </p:txBody>
-      </p:sp>
-      <p:sp>
-        <p:nvSpPr>
-          <p:cNvPr id="48" name="Text 46"/>
-          <p:cNvSpPr/>
-          <p:nvPr/>
-        </p:nvSpPr>
-        <p:spPr>
-          <a:xfrm>
-            <a:off x="2743200" y="7114032"/>
-            <a:ext cx="4480560" cy="182880"/>
-          </a:xfrm>
-          <a:prstGeom prst="rect">
-            <a:avLst/>
-          </a:prstGeom>
-          <a:noFill/>
-          <a:ln/>
-        </p:spPr>
-        <p:txBody>
-          <a:bodyPr wrap="square" rtlCol="0" anchor="ctr"/>
-          <a:lstStyle/>
-          <a:p>
-            <a:pPr indent="0" marL="0">
-              <a:buNone/>
-            </a:pPr>
-            <a:r>
-              <a:rPr lang="en-US" sz="950" i="1" dirty="0">
-                <a:solidFill>
-                  <a:srgbClr val="4B5563"/>
-                </a:solidFill>
-              </a:rPr>
-              <a:t>运营统筹</a:t>
-            </a:r>
-            <a:endParaRPr lang="en-US" sz="950" dirty="0"/>
-          </a:p>
-        </p:txBody>
-      </p:sp>
-      <p:sp>
-        <p:nvSpPr>
-          <p:cNvPr id="49" name="Text 47"/>
-          <p:cNvSpPr/>
-          <p:nvPr/>
-        </p:nvSpPr>
-        <p:spPr>
-          <a:xfrm>
-            <a:off x="2834640" y="7315200"/>
-            <a:ext cx="4389120" cy="164592"/>
-          </a:xfrm>
-          <a:prstGeom prst="rect">
-            <a:avLst/>
-          </a:prstGeom>
-          <a:noFill/>
-          <a:ln/>
-        </p:spPr>
-        <p:txBody>
-          <a:bodyPr wrap="square" rtlCol="0" anchor="t"/>
-          <a:lstStyle/>
-          <a:p>
-            <a:pPr indent="0" marL="0">
-              <a:lnSpc>
-                <a:spcPts val="1200"/>
-              </a:lnSpc>
-              <a:buNone/>
-            </a:pPr>
-            <a:r>
-              <a:rPr lang="en-US" sz="900" dirty="0">
-                <a:solidFill>
-                  <a:srgbClr val="4B5563"/>
-                </a:solidFill>
-              </a:rPr>
               <a:t>• </a:t>
             </a:r>
-            <a:pPr indent="0" marL="0">
-              <a:lnSpc>
-                <a:spcPts val="1200"/>
-              </a:lnSpc>
-              <a:buNone/>
-            </a:pPr>
-            <a:r>
-              <a:rPr lang="en-US" sz="900" dirty="0">
-                <a:solidFill>
-                  <a:srgbClr val="4B5563"/>
-                </a:solidFill>
-              </a:rPr>
-              <a:t>审核视频脚本、指导拍摄并把控最终成片质量。</a:t>
-            </a:r>
-            <a:endParaRPr lang="en-US" sz="900" dirty="0"/>
-          </a:p>
-        </p:txBody>
-      </p:sp>
-      <p:sp>
-        <p:nvSpPr>
-          <p:cNvPr id="50" name="Text 48"/>
-          <p:cNvSpPr/>
-          <p:nvPr/>
-        </p:nvSpPr>
-        <p:spPr>
-          <a:xfrm>
-            <a:off x="2834640" y="7525512"/>
-            <a:ext cx="4389120" cy="164592"/>
-          </a:xfrm>
-          <a:prstGeom prst="rect">
-            <a:avLst/>
-          </a:prstGeom>
-          <a:noFill/>
-          <a:ln/>
-        </p:spPr>
-        <p:txBody>
-          <a:bodyPr wrap="square" rtlCol="0" anchor="t"/>
-          <a:lstStyle/>
-          <a:p>
-            <a:pPr indent="0" marL="0">
-              <a:lnSpc>
-                <a:spcPts val="1200"/>
-              </a:lnSpc>
-              <a:buNone/>
-            </a:pPr>
-            <a:r>
-              <a:rPr lang="en-US" sz="900" dirty="0">
-                <a:solidFill>
-                  <a:srgbClr val="4B5563"/>
-                </a:solidFill>
-              </a:rPr>
-              <a:t>• </a:t>
-            </a:r>
-            <a:pPr indent="0" marL="0">
-              <a:lnSpc>
-                <a:spcPts val="1200"/>
-              </a:lnSpc>
-              <a:buNone/>
-            </a:pPr>
-            <a:r>
-              <a:rPr lang="en-US" sz="900" dirty="0">
-                <a:solidFill>
-                  <a:srgbClr val="4B5563"/>
-                </a:solidFill>
-              </a:rPr>
-              <a:t>结合高考热点策划学部宣传片，取得年度最佳曝光。</a:t>
-            </a:r>
-            <a:endParaRPr lang="en-US" sz="900" dirty="0"/>
-          </a:p>
-        </p:txBody>
-      </p:sp>
-      <p:sp>
-        <p:nvSpPr>
-          <p:cNvPr id="51" name="Text 49"/>
-          <p:cNvSpPr/>
-          <p:nvPr/>
-        </p:nvSpPr>
-        <p:spPr>
-          <a:xfrm>
-            <a:off x="2743200" y="7872984"/>
-            <a:ext cx="2834640" cy="182880"/>
-          </a:xfrm>
-          <a:prstGeom prst="rect">
-            <a:avLst/>
-          </a:prstGeom>
-          <a:noFill/>
-          <a:ln/>
-        </p:spPr>
-        <p:txBody>
-          <a:bodyPr wrap="square" rtlCol="0" anchor="ctr"/>
-          <a:lstStyle/>
-          <a:p>
-            <a:pPr indent="0" marL="0">
-              <a:buNone/>
-            </a:pPr>
-            <a:r>
-              <a:rPr lang="en-US" sz="1050" b="1" dirty="0">
-                <a:solidFill>
-                  <a:srgbClr val="1F2937"/>
-                </a:solidFill>
-              </a:rPr>
-              <a:t>校级宣传视频《百年征程》</a:t>
-            </a:r>
-            <a:endParaRPr lang="en-US" sz="1050" dirty="0"/>
-          </a:p>
-        </p:txBody>
-      </p:sp>
-      <p:sp>
-        <p:nvSpPr>
-          <p:cNvPr id="52" name="Text 50"/>
-          <p:cNvSpPr/>
-          <p:nvPr/>
-        </p:nvSpPr>
-        <p:spPr>
-          <a:xfrm>
-            <a:off x="5577840" y="7872984"/>
-            <a:ext cx="1645920" cy="182880"/>
-          </a:xfrm>
-          <a:prstGeom prst="rect">
-            <a:avLst/>
-          </a:prstGeom>
-          <a:noFill/>
-          <a:ln/>
-        </p:spPr>
-        <p:txBody>
-          <a:bodyPr wrap="square" rtlCol="0" anchor="ctr"/>
-          <a:lstStyle/>
-          <a:p>
-            <a:pPr algn="r" indent="0" marL="0">
-              <a:buNone/>
-            </a:pPr>
-            <a:r>
-              <a:rPr lang="en-US" sz="900" dirty="0">
-                <a:solidFill>
-                  <a:srgbClr val="6B7280"/>
-                </a:solidFill>
-              </a:rPr>
-              <a:t>2023.05 - 2023.07</a:t>
-            </a:r>
-            <a:endParaRPr lang="en-US" sz="900" dirty="0"/>
-          </a:p>
-        </p:txBody>
-      </p:sp>
-      <p:sp>
-        <p:nvSpPr>
-          <p:cNvPr id="53" name="Text 51"/>
-          <p:cNvSpPr/>
-          <p:nvPr/>
-        </p:nvSpPr>
-        <p:spPr>
-          <a:xfrm>
-            <a:off x="2743200" y="8055864"/>
-            <a:ext cx="4480560" cy="182880"/>
-          </a:xfrm>
-          <a:prstGeom prst="rect">
-            <a:avLst/>
-          </a:prstGeom>
-          <a:noFill/>
-          <a:ln/>
-        </p:spPr>
-        <p:txBody>
-          <a:bodyPr wrap="square" rtlCol="0" anchor="ctr"/>
-          <a:lstStyle/>
-          <a:p>
-            <a:pPr indent="0" marL="0">
-              <a:buNone/>
-            </a:pPr>
-            <a:r>
-              <a:rPr lang="en-US" sz="950" i="1" dirty="0">
-                <a:solidFill>
-                  <a:srgbClr val="4B5563"/>
-                </a:solidFill>
-              </a:rPr>
-              <a:t>后期制作</a:t>
-            </a:r>
-            <a:endParaRPr lang="en-US" sz="950" dirty="0"/>
-          </a:p>
-        </p:txBody>
-      </p:sp>
-      <p:sp>
-        <p:nvSpPr>
-          <p:cNvPr id="54" name="Text 52"/>
-          <p:cNvSpPr/>
-          <p:nvPr/>
-        </p:nvSpPr>
-        <p:spPr>
-          <a:xfrm>
-            <a:off x="2834640" y="8257032"/>
-            <a:ext cx="4389120" cy="329184"/>
-          </a:xfrm>
-          <a:prstGeom prst="rect">
-            <a:avLst/>
-          </a:prstGeom>
-          <a:noFill/>
-          <a:ln/>
-        </p:spPr>
-        <p:txBody>
-          <a:bodyPr wrap="square" rtlCol="0" anchor="t"/>
-          <a:lstStyle/>
-          <a:p>
-            <a:pPr indent="0" marL="0">
-              <a:lnSpc>
-                <a:spcPts val="1200"/>
-              </a:lnSpc>
-              <a:buNone/>
-            </a:pPr>
-            <a:r>
-              <a:rPr lang="en-US" sz="900" dirty="0">
-                <a:solidFill>
-                  <a:srgbClr val="4B5563"/>
-                </a:solidFill>
-              </a:rPr>
-              <a:t>• </a:t>
-            </a:r>
-            <a:pPr indent="0" marL="0">
-              <a:lnSpc>
-                <a:spcPts val="1200"/>
-              </a:lnSpc>
-              <a:buNone/>
-            </a:pPr>
-            <a:r>
-              <a:rPr lang="en-US" sz="900" dirty="0">
-                <a:solidFill>
-                  <a:srgbClr val="4B5563"/>
-                </a:solidFill>
-              </a:rPr>
-              <a:t>使用 Adobe AE 制作特效，DaVinci Resolve 调色。作品获校级特等奖。</a:t>
-            </a:r>
-            <a:endParaRPr lang="en-US" sz="900" dirty="0"/>
-          </a:p>
-        </p:txBody>
-      </p:sp>
-      <p:sp>
-        <p:nvSpPr>
-          <p:cNvPr id="55" name="Text 53"/>
-          <p:cNvSpPr/>
-          <p:nvPr/>
-        </p:nvSpPr>
-        <p:spPr>
-          <a:xfrm>
-            <a:off x="2743200" y="8769096"/>
-            <a:ext cx="2834640" cy="182880"/>
-          </a:xfrm>
-          <a:prstGeom prst="rect">
-            <a:avLst/>
-          </a:prstGeom>
-          <a:noFill/>
-          <a:ln/>
-        </p:spPr>
-        <p:txBody>
-          <a:bodyPr wrap="square" rtlCol="0" anchor="ctr"/>
-          <a:lstStyle/>
-          <a:p>
-            <a:pPr indent="0" marL="0">
-              <a:buNone/>
-            </a:pPr>
-            <a:r>
-              <a:rPr lang="en-US" sz="1050" b="1" dirty="0">
-                <a:solidFill>
-                  <a:srgbClr val="1F2937"/>
-                </a:solidFill>
-              </a:rPr>
-              <a:t>“游戏配乐与玩家情绪”研究</a:t>
-            </a:r>
-            <a:endParaRPr lang="en-US" sz="1050" dirty="0"/>
-          </a:p>
-        </p:txBody>
-      </p:sp>
-      <p:sp>
-        <p:nvSpPr>
-          <p:cNvPr id="56" name="Text 54"/>
-          <p:cNvSpPr/>
-          <p:nvPr/>
-        </p:nvSpPr>
-        <p:spPr>
-          <a:xfrm>
-            <a:off x="5577840" y="8769096"/>
-            <a:ext cx="1645920" cy="182880"/>
-          </a:xfrm>
-          <a:prstGeom prst="rect">
-            <a:avLst/>
-          </a:prstGeom>
-          <a:noFill/>
-          <a:ln/>
-        </p:spPr>
-        <p:txBody>
-          <a:bodyPr wrap="square" rtlCol="0" anchor="ctr"/>
-          <a:lstStyle/>
-          <a:p>
-            <a:pPr algn="r" indent="0" marL="0">
-              <a:buNone/>
-            </a:pPr>
-            <a:r>
-              <a:rPr lang="en-US" sz="900" dirty="0">
-                <a:solidFill>
-                  <a:srgbClr val="6B7280"/>
-                </a:solidFill>
-              </a:rPr>
-              <a:t>2022.01 - 2024.05</a:t>
-            </a:r>
-            <a:endParaRPr lang="en-US" sz="900" dirty="0"/>
-          </a:p>
-        </p:txBody>
-      </p:sp>
-      <p:sp>
-        <p:nvSpPr>
-          <p:cNvPr id="57" name="Text 55"/>
-          <p:cNvSpPr/>
-          <p:nvPr/>
-        </p:nvSpPr>
-        <p:spPr>
-          <a:xfrm>
-            <a:off x="2743200" y="8951976"/>
-            <a:ext cx="4480560" cy="182880"/>
-          </a:xfrm>
-          <a:prstGeom prst="rect">
-            <a:avLst/>
-          </a:prstGeom>
-          <a:noFill/>
-          <a:ln/>
-        </p:spPr>
-        <p:txBody>
-          <a:bodyPr wrap="square" rtlCol="0" anchor="ctr"/>
-          <a:lstStyle/>
-          <a:p>
-            <a:pPr indent="0" marL="0">
-              <a:buNone/>
-            </a:pPr>
-            <a:r>
-              <a:rPr lang="en-US" sz="950" i="1" dirty="0">
-                <a:solidFill>
-                  <a:srgbClr val="4B5563"/>
-                </a:solidFill>
-              </a:rPr>
-              <a:t>大创项目（组长）</a:t>
-            </a:r>
-            <a:endParaRPr lang="en-US" sz="950" dirty="0"/>
-          </a:p>
-        </p:txBody>
-      </p:sp>
-      <p:sp>
-        <p:nvSpPr>
-          <p:cNvPr id="58" name="Text 56"/>
-          <p:cNvSpPr/>
-          <p:nvPr/>
-        </p:nvSpPr>
-        <p:spPr>
-          <a:xfrm>
-            <a:off x="2834640" y="9153144"/>
-            <a:ext cx="4389120" cy="164592"/>
-          </a:xfrm>
-          <a:prstGeom prst="rect">
-            <a:avLst/>
-          </a:prstGeom>
-          <a:noFill/>
-          <a:ln/>
-        </p:spPr>
-        <p:txBody>
-          <a:bodyPr wrap="square" rtlCol="0" anchor="t"/>
-          <a:lstStyle/>
-          <a:p>
-            <a:pPr indent="0" marL="0">
-              <a:lnSpc>
-                <a:spcPts val="1200"/>
-              </a:lnSpc>
-              <a:buNone/>
-            </a:pPr>
-            <a:r>
-              <a:rPr lang="en-US" sz="900" dirty="0">
-                <a:solidFill>
-                  <a:srgbClr val="4B5563"/>
-                </a:solidFill>
-              </a:rPr>
-              <a:t>• </a:t>
-            </a:r>
-            <a:pPr indent="0" marL="0">
-              <a:lnSpc>
-                <a:spcPts val="1200"/>
-              </a:lnSpc>
-              <a:buNone/>
-            </a:pPr>
-            <a:r>
-              <a:rPr lang="en-US" sz="900" dirty="0">
-                <a:solidFill>
-                  <a:srgbClr val="4B5563"/>
-                </a:solidFill>
-              </a:rPr>
-              <a:t>设计测试情境，通过定量分析得出3节拍快节奏配乐更能激发玩家情绪的结论。</a:t>
-            </a:r>
-            <a:endParaRPr lang="en-US" sz="900" dirty="0"/>
-          </a:p>
-        </p:txBody>
-      </p:sp>
-      <p:sp>
-        <p:nvSpPr>
-          <p:cNvPr id="59" name="Text 57"/>
-          <p:cNvSpPr/>
-          <p:nvPr/>
-        </p:nvSpPr>
-        <p:spPr>
-          <a:xfrm>
-            <a:off x="2743200" y="9500616"/>
-            <a:ext cx="2834640" cy="182880"/>
-          </a:xfrm>
-          <a:prstGeom prst="rect">
-            <a:avLst/>
-          </a:prstGeom>
-          <a:noFill/>
-          <a:ln/>
-        </p:spPr>
-        <p:txBody>
-          <a:bodyPr wrap="square" rtlCol="0" anchor="ctr"/>
-          <a:lstStyle/>
-          <a:p>
-            <a:pPr indent="0" marL="0">
-              <a:buNone/>
-            </a:pPr>
-            <a:r>
-              <a:rPr lang="en-US" sz="1050" b="1" dirty="0">
-                <a:solidFill>
-                  <a:srgbClr val="1F2937"/>
-                </a:solidFill>
-              </a:rPr>
-              <a:t>心理教师（实习）</a:t>
-            </a:r>
-            <a:endParaRPr lang="en-US" sz="1050" dirty="0"/>
-          </a:p>
-        </p:txBody>
-      </p:sp>
-      <p:sp>
-        <p:nvSpPr>
-          <p:cNvPr id="60" name="Text 58"/>
-          <p:cNvSpPr/>
-          <p:nvPr/>
-        </p:nvSpPr>
-        <p:spPr>
-          <a:xfrm>
-            <a:off x="5577840" y="9500616"/>
-            <a:ext cx="1645920" cy="182880"/>
-          </a:xfrm>
-          <a:prstGeom prst="rect">
-            <a:avLst/>
-          </a:prstGeom>
-          <a:noFill/>
-          <a:ln/>
-        </p:spPr>
-        <p:txBody>
-          <a:bodyPr wrap="square" rtlCol="0" anchor="ctr"/>
-          <a:lstStyle/>
-          <a:p>
-            <a:pPr algn="r" indent="0" marL="0">
-              <a:buNone/>
-            </a:pPr>
-            <a:r>
-              <a:rPr lang="en-US" sz="900" dirty="0">
-                <a:solidFill>
-                  <a:srgbClr val="6B7280"/>
-                </a:solidFill>
-              </a:rPr>
-              <a:t>2024.02 - 2024.06</a:t>
-            </a:r>
-            <a:endParaRPr lang="en-US" sz="900" dirty="0"/>
-          </a:p>
-        </p:txBody>
-      </p:sp>
-      <p:sp>
-        <p:nvSpPr>
-          <p:cNvPr id="61" name="Text 59"/>
-          <p:cNvSpPr/>
-          <p:nvPr/>
-        </p:nvSpPr>
-        <p:spPr>
-          <a:xfrm>
-            <a:off x="2743200" y="9683496"/>
-            <a:ext cx="4480560" cy="182880"/>
-          </a:xfrm>
-          <a:prstGeom prst="rect">
-            <a:avLst/>
-          </a:prstGeom>
-          <a:noFill/>
-          <a:ln/>
-        </p:spPr>
-        <p:txBody>
-          <a:bodyPr wrap="square" rtlCol="0" anchor="ctr"/>
-          <a:lstStyle/>
-          <a:p>
-            <a:pPr indent="0" marL="0">
-              <a:buNone/>
-            </a:pPr>
-            <a:r>
-              <a:rPr lang="en-US" sz="950" i="1" dirty="0">
-                <a:solidFill>
-                  <a:srgbClr val="4B5563"/>
-                </a:solidFill>
-              </a:rPr>
-              <a:t>郑州实验外国语学校</a:t>
-            </a:r>
-            <a:endParaRPr lang="en-US" sz="950" dirty="0"/>
-          </a:p>
-        </p:txBody>
-      </p:sp>
-      <p:sp>
-        <p:nvSpPr>
-          <p:cNvPr id="62" name="Text 60"/>
-          <p:cNvSpPr/>
-          <p:nvPr/>
-        </p:nvSpPr>
-        <p:spPr>
-          <a:xfrm>
-            <a:off x="2834640" y="9884664"/>
-            <a:ext cx="4389120" cy="329184"/>
-          </a:xfrm>
-          <a:prstGeom prst="rect">
-            <a:avLst/>
-          </a:prstGeom>
-          <a:noFill/>
-          <a:ln/>
-        </p:spPr>
-        <p:txBody>
-          <a:bodyPr wrap="square" rtlCol="0" anchor="t"/>
-          <a:lstStyle/>
-          <a:p>
-            <a:pPr indent="0" marL="0">
-              <a:lnSpc>
-                <a:spcPts val="1200"/>
-              </a:lnSpc>
-              <a:buNone/>
-            </a:pPr>
-            <a:r>
-              <a:rPr lang="en-US" sz="900" dirty="0">
-                <a:solidFill>
-                  <a:srgbClr val="4B5563"/>
-                </a:solidFill>
-              </a:rPr>
-              <a:t>• </a:t>
-            </a:r>
-            <a:pPr indent="0" marL="0">
-              <a:lnSpc>
-                <a:spcPts val="1200"/>
-              </a:lnSpc>
-              <a:buNone/>
-            </a:pPr>
             <a:r>
               <a:rPr lang="en-US" sz="900" dirty="0">
                 <a:solidFill>
@@ -3375,7 +3233,7 @@
     </a:clrScheme>
     <a:fontScheme name="Office">
       <a:majorFont>
-        <a:latin typeface="Calibri Light" panose="020F0302020204030204"/>
+        <a:latin typeface="Calibri Light"/>
         <a:ea typeface=""/>
         <a:cs typeface=""/>
         <a:font script="Jpan" typeface="游ゴシック Light"/>
@@ -3408,26 +3266,9 @@
         <a:font script="Viet" typeface="Times New Roman"/>
         <a:font script="Uigh" typeface="Microsoft Uighur"/>
         <a:font script="Geor" typeface="Sylfaen"/>
-        <a:font script="Armn" typeface="Arial"/>
-        <a:font script="Bugi" typeface="Leelawadee UI"/>
-        <a:font script="Bopo" typeface="Microsoft JhengHei"/>
-        <a:font script="Java" typeface="Javanese Text"/>
-        <a:font script="Lisu" typeface="Segoe UI"/>
-        <a:font script="Mymr" typeface="Myanmar Text"/>
-        <a:font script="Nkoo" typeface="Ebrima"/>
-        <a:font script="Olck" typeface="Nirmala UI"/>
-        <a:font script="Osma" typeface="Ebrima"/>
-        <a:font script="Phag" typeface="Phagspa"/>
-        <a:font script="Syrn" typeface="Estrangelo Edessa"/>
-        <a:font script="Syrj" typeface="Estrangelo Edessa"/>
-        <a:font script="Syre" typeface="Estrangelo Edessa"/>
-        <a:font script="Sora" typeface="Nirmala UI"/>
-        <a:font script="Tale" typeface="Microsoft Tai Le"/>
-        <a:font script="Talu" typeface="Microsoft New Tai Lue"/>
-        <a:font script="Tfng" typeface="Ebrima"/>
       </a:majorFont>
       <a:minorFont>
-        <a:latin typeface="Calibri" panose="020F0502020204030204"/>
+        <a:latin typeface="Calibri"/>
         <a:ea typeface=""/>
         <a:cs typeface=""/>
         <a:font script="Jpan" typeface="游ゴシック"/>
@@ -3460,23 +3301,6 @@
         <a:font script="Viet" typeface="Arial"/>
         <a:font script="Uigh" typeface="Microsoft Uighur"/>
         <a:font script="Geor" typeface="Sylfaen"/>
-        <a:font script="Armn" typeface="Arial"/>
-        <a:font script="Bugi" typeface="Leelawadee UI"/>
-        <a:font script="Bopo" typeface="Microsoft JhengHei"/>
-        <a:font script="Java" typeface="Javanese Text"/>
-        <a:font script="Lisu" typeface="Segoe UI"/>
-        <a:font script="Mymr" typeface="Myanmar Text"/>
-        <a:font script="Nkoo" typeface="Ebrima"/>
-        <a:font script="Olck" typeface="Nirmala UI"/>
-        <a:font script="Osma" typeface="Ebrima"/>
-        <a:font script="Phag" typeface="Phagspa"/>
-        <a:font script="Syrn" typeface="Estrangelo Edessa"/>
-        <a:font script="Syrj" typeface="Estrangelo Edessa"/>
-        <a:font script="Syre" typeface="Estrangelo Edessa"/>
-        <a:font script="Sora" typeface="Nirmala UI"/>
-        <a:font script="Tale" typeface="Microsoft Tai Le"/>
-        <a:font script="Talu" typeface="Microsoft New Tai Lue"/>
-        <a:font script="Tfng" typeface="Ebrima"/>
       </a:minorFont>
     </a:fontScheme>
     <a:fmtScheme name="Office">
@@ -3617,8 +3441,265 @@
       </a:bgFillStyleLst>
     </a:fmtScheme>
   </a:themeElements>
-  <a:objectDefaults/>
-  <a:extraClrSchemeLst/>
+  <a:extLst>
+    <a:ext uri="{05A4C25C-085E-4340-85A3-A5531E510DB2}">
+      <thm15:themeFamily xmlns:thm15="http://schemas.microsoft.com/office/thememl/2012/main" name="Office Theme" id="{62F939B6-93AF-4DB8-9C6B-D6C7DFDC589F}" vid="{4A3C46E8-61CC-4603-A589-7422A47A8E4A}"/>
+    </a:ext>
+  </a:extLst>
+</a:theme>
+</file>
+
+<file path=ppt/theme/theme2.xml><?xml version="1.0" encoding="utf-8"?>
+<a:theme xmlns:a="http://schemas.openxmlformats.org/drawingml/2006/main" name="Office Theme">
+  <a:themeElements>
+    <a:clrScheme name="Office">
+      <a:dk1>
+        <a:sysClr val="windowText" lastClr="000000"/>
+      </a:dk1>
+      <a:lt1>
+        <a:sysClr val="window" lastClr="FFFFFF"/>
+      </a:lt1>
+      <a:dk2>
+        <a:srgbClr val="44546A"/>
+      </a:dk2>
+      <a:lt2>
+        <a:srgbClr val="E7E6E6"/>
+      </a:lt2>
+      <a:accent1>
+        <a:srgbClr val="4472C4"/>
+      </a:accent1>
+      <a:accent2>
+        <a:srgbClr val="ED7D31"/>
+      </a:accent2>
+      <a:accent3>
+        <a:srgbClr val="A5A5A5"/>
+      </a:accent3>
+      <a:accent4>
+        <a:srgbClr val="FFC000"/>
+      </a:accent4>
+      <a:accent5>
+        <a:srgbClr val="5B9BD5"/>
+      </a:accent5>
+      <a:accent6>
+        <a:srgbClr val="70AD47"/>
+      </a:accent6>
+      <a:hlink>
+        <a:srgbClr val="0563C1"/>
+      </a:hlink>
+      <a:folHlink>
+        <a:srgbClr val="954F72"/>
+      </a:folHlink>
+    </a:clrScheme>
+    <a:fontScheme name="Office">
+      <a:majorFont>
+        <a:latin typeface="Calibri Light"/>
+        <a:ea typeface=""/>
+        <a:cs typeface=""/>
+        <a:font script="Jpan" typeface="游ゴシック Light"/>
+        <a:font script="Hang" typeface="맑은 고딕"/>
+        <a:font script="Hans" typeface="等线 Light"/>
+        <a:font script="Hant" typeface="新細明體"/>
+        <a:font script="Arab" typeface="Times New Roman"/>
+        <a:font script="Hebr" typeface="Times New Roman"/>
+        <a:font script="Thai" typeface="Angsana New"/>
+        <a:font script="Ethi" typeface="Nyala"/>
+        <a:font script="Beng" typeface="Vrinda"/>
+        <a:font script="Gujr" typeface="Shruti"/>
+        <a:font script="Khmr" typeface="MoolBoran"/>
+        <a:font script="Knda" typeface="Tunga"/>
+        <a:font script="Guru" typeface="Raavi"/>
+        <a:font script="Cans" typeface="Euphemia"/>
+        <a:font script="Cher" typeface="Plantagenet Cherokee"/>
+        <a:font script="Yiii" typeface="Microsoft Yi Baiti"/>
+        <a:font script="Tibt" typeface="Microsoft Himalaya"/>
+        <a:font script="Thaa" typeface="MV Boli"/>
+        <a:font script="Deva" typeface="Mangal"/>
+        <a:font script="Telu" typeface="Gautami"/>
+        <a:font script="Taml" typeface="Latha"/>
+        <a:font script="Syrc" typeface="Estrangelo Edessa"/>
+        <a:font script="Orya" typeface="Kalinga"/>
+        <a:font script="Mlym" typeface="Kartika"/>
+        <a:font script="Laoo" typeface="DokChampa"/>
+        <a:font script="Sinh" typeface="Iskoola Pota"/>
+        <a:font script="Mong" typeface="Mongolian Baiti"/>
+        <a:font script="Viet" typeface="Times New Roman"/>
+        <a:font script="Uigh" typeface="Microsoft Uighur"/>
+        <a:font script="Geor" typeface="Sylfaen"/>
+      </a:majorFont>
+      <a:minorFont>
+        <a:latin typeface="Calibri"/>
+        <a:ea typeface=""/>
+        <a:cs typeface=""/>
+        <a:font script="Jpan" typeface="游ゴシック"/>
+        <a:font script="Hang" typeface="맑은 고딕"/>
+        <a:font script="Hans" typeface="等线"/>
+        <a:font script="Hant" typeface="新細明體"/>
+        <a:font script="Arab" typeface="Arial"/>
+        <a:font script="Hebr" typeface="Arial"/>
+        <a:font script="Thai" typeface="Cordia New"/>
+        <a:font script="Ethi" typeface="Nyala"/>
+        <a:font script="Beng" typeface="Vrinda"/>
+        <a:font script="Gujr" typeface="Shruti"/>
+        <a:font script="Khmr" typeface="DaunPenh"/>
+        <a:font script="Knda" typeface="Tunga"/>
+        <a:font script="Guru" typeface="Raavi"/>
+        <a:font script="Cans" typeface="Euphemia"/>
+        <a:font script="Cher" typeface="Plantagenet Cherokee"/>
+        <a:font script="Yiii" typeface="Microsoft Yi Baiti"/>
+        <a:font script="Tibt" typeface="Microsoft Himalaya"/>
+        <a:font script="Thaa" typeface="MV Boli"/>
+        <a:font script="Deva" typeface="Mangal"/>
+        <a:font script="Telu" typeface="Gautami"/>
+        <a:font script="Taml" typeface="Latha"/>
+        <a:font script="Syrc" typeface="Estrangelo Edessa"/>
+        <a:font script="Orya" typeface="Kalinga"/>
+        <a:font script="Mlym" typeface="Kartika"/>
+        <a:font script="Laoo" typeface="DokChampa"/>
+        <a:font script="Sinh" typeface="Iskoola Pota"/>
+        <a:font script="Mong" typeface="Mongolian Baiti"/>
+        <a:font script="Viet" typeface="Arial"/>
+        <a:font script="Uigh" typeface="Microsoft Uighur"/>
+        <a:font script="Geor" typeface="Sylfaen"/>
+      </a:minorFont>
+    </a:fontScheme>
+    <a:fmtScheme name="Office">
+      <a:fillStyleLst>
+        <a:solidFill>
+          <a:schemeClr val="phClr"/>
+        </a:solidFill>
+        <a:gradFill rotWithShape="1">
+          <a:gsLst>
+            <a:gs pos="0">
+              <a:schemeClr val="phClr">
+                <a:lumMod val="110000"/>
+                <a:satMod val="105000"/>
+                <a:tint val="67000"/>
+              </a:schemeClr>
+            </a:gs>
+            <a:gs pos="50000">
+              <a:schemeClr val="phClr">
+                <a:lumMod val="105000"/>
+                <a:satMod val="103000"/>
+                <a:tint val="73000"/>
+              </a:schemeClr>
+            </a:gs>
+            <a:gs pos="100000">
+              <a:schemeClr val="phClr">
+                <a:lumMod val="105000"/>
+                <a:satMod val="109000"/>
+                <a:tint val="81000"/>
+              </a:schemeClr>
+            </a:gs>
+          </a:gsLst>
+          <a:lin ang="5400000" scaled="0"/>
+        </a:gradFill>
+        <a:gradFill rotWithShape="1">
+          <a:gsLst>
+            <a:gs pos="0">
+              <a:schemeClr val="phClr">
+                <a:satMod val="103000"/>
+                <a:lumMod val="102000"/>
+                <a:tint val="94000"/>
+              </a:schemeClr>
+            </a:gs>
+            <a:gs pos="50000">
+              <a:schemeClr val="phClr">
+                <a:satMod val="110000"/>
+                <a:lumMod val="100000"/>
+                <a:shade val="100000"/>
+              </a:schemeClr>
+            </a:gs>
+            <a:gs pos="100000">
+              <a:schemeClr val="phClr">
+                <a:lumMod val="99000"/>
+                <a:satMod val="120000"/>
+                <a:shade val="78000"/>
+              </a:schemeClr>
+            </a:gs>
+          </a:gsLst>
+          <a:lin ang="5400000" scaled="0"/>
+        </a:gradFill>
+      </a:fillStyleLst>
+      <a:lnStyleLst>
+        <a:ln w="6350" cap="flat" cmpd="sng" algn="ctr">
+          <a:solidFill>
+            <a:schemeClr val="phClr"/>
+          </a:solidFill>
+          <a:prstDash val="solid"/>
+          <a:miter lim="800000"/>
+        </a:ln>
+        <a:ln w="12700" cap="flat" cmpd="sng" algn="ctr">
+          <a:solidFill>
+            <a:schemeClr val="phClr"/>
+          </a:solidFill>
+          <a:prstDash val="solid"/>
+          <a:miter lim="800000"/>
+        </a:ln>
+        <a:ln w="19050" cap="flat" cmpd="sng" algn="ctr">
+          <a:solidFill>
+            <a:schemeClr val="phClr"/>
+          </a:solidFill>
+          <a:prstDash val="solid"/>
+          <a:miter lim="800000"/>
+        </a:ln>
+      </a:lnStyleLst>
+      <a:effectStyleLst>
+        <a:effectStyle>
+          <a:effectLst/>
+        </a:effectStyle>
+        <a:effectStyle>
+          <a:effectLst/>
+        </a:effectStyle>
+        <a:effectStyle>
+          <a:effectLst>
+            <a:outerShdw blurRad="57150" dist="19050" dir="5400000" algn="ctr" rotWithShape="0">
+              <a:srgbClr val="000000">
+                <a:alpha val="63000"/>
+              </a:srgbClr>
+            </a:outerShdw>
+          </a:effectLst>
+        </a:effectStyle>
+      </a:effectStyleLst>
+      <a:bgFillStyleLst>
+        <a:solidFill>
+          <a:schemeClr val="phClr"/>
+        </a:solidFill>
+        <a:solidFill>
+          <a:schemeClr val="phClr">
+            <a:tint val="95000"/>
+            <a:satMod val="170000"/>
+          </a:schemeClr>
+        </a:solidFill>
+        <a:gradFill rotWithShape="1">
+          <a:gsLst>
+            <a:gs pos="0">
+              <a:schemeClr val="phClr">
+                <a:tint val="93000"/>
+                <a:satMod val="150000"/>
+                <a:shade val="98000"/>
+                <a:lumMod val="102000"/>
+              </a:schemeClr>
+            </a:gs>
+            <a:gs pos="50000">
+              <a:schemeClr val="phClr">
+                <a:tint val="98000"/>
+                <a:satMod val="130000"/>
+                <a:shade val="90000"/>
+                <a:lumMod val="103000"/>
+              </a:schemeClr>
+            </a:gs>
+            <a:gs pos="100000">
+              <a:schemeClr val="phClr">
+                <a:shade val="63000"/>
+                <a:satMod val="120000"/>
+              </a:schemeClr>
+            </a:gs>
+          </a:gsLst>
+          <a:lin ang="5400000" scaled="0"/>
+        </a:gradFill>
+      </a:bgFillStyleLst>
+    </a:fmtScheme>
+  </a:themeElements>
   <a:extLst>
     <a:ext uri="{05A4C25C-085E-4340-85A3-A5531E510DB2}">
       <thm15:themeFamily xmlns:thm15="http://schemas.microsoft.com/office/thememl/2012/main" name="Office Theme" id="{62F939B6-93AF-4DB8-9C6B-D6C7DFDC589F}" vid="{4A3C46E8-61CC-4603-A589-7422A47A8E4A}"/>
